--- a/docs/presentations/Final Presentation/Final Capstone Presentation.pptx
+++ b/docs/presentations/Final Presentation/Final Capstone Presentation.pptx
@@ -6,6 +6,14 @@
   </p:sldMasterIdLst>
   <p:sldIdLst>
     <p:sldId id="256" r:id="rId2"/>
+    <p:sldId id="257" r:id="rId3"/>
+    <p:sldId id="258" r:id="rId4"/>
+    <p:sldId id="259" r:id="rId5"/>
+    <p:sldId id="260" r:id="rId6"/>
+    <p:sldId id="261" r:id="rId7"/>
+    <p:sldId id="262" r:id="rId8"/>
+    <p:sldId id="263" r:id="rId9"/>
+    <p:sldId id="264" r:id="rId10"/>
   </p:sldIdLst>
   <p:sldSz cx="12192000" cy="6858000"/>
   <p:notesSz cx="6858000" cy="9144000"/>
@@ -104,6 +112,11 @@
       </a:defRPr>
     </a:lvl9pPr>
   </p:defaultTextStyle>
+  <p:extLst>
+    <p:ext uri="{EFAFB233-063F-42B5-8137-9DF3F51BA10A}">
+      <p15:sldGuideLst xmlns:p15="http://schemas.microsoft.com/office/powerpoint/2012/main"/>
+    </p:ext>
+  </p:extLst>
 </p:presentation>
 </file>
 
@@ -254,7 +267,7 @@
           <a:p>
             <a:fld id="{F4235B46-9602-B846-94AE-748D490F72A7}" type="datetimeFigureOut">
               <a:rPr lang="en-US" smtClean="0"/>
-              <a:t>4/24/26</a:t>
+              <a:t>4/26/26</a:t>
             </a:fld>
             <a:endParaRPr lang="en-US"/>
           </a:p>
@@ -452,7 +465,7 @@
           <a:p>
             <a:fld id="{F4235B46-9602-B846-94AE-748D490F72A7}" type="datetimeFigureOut">
               <a:rPr lang="en-US" smtClean="0"/>
-              <a:t>4/24/26</a:t>
+              <a:t>4/26/26</a:t>
             </a:fld>
             <a:endParaRPr lang="en-US"/>
           </a:p>
@@ -660,7 +673,7 @@
           <a:p>
             <a:fld id="{F4235B46-9602-B846-94AE-748D490F72A7}" type="datetimeFigureOut">
               <a:rPr lang="en-US" smtClean="0"/>
-              <a:t>4/24/26</a:t>
+              <a:t>4/26/26</a:t>
             </a:fld>
             <a:endParaRPr lang="en-US"/>
           </a:p>
@@ -858,7 +871,7 @@
           <a:p>
             <a:fld id="{F4235B46-9602-B846-94AE-748D490F72A7}" type="datetimeFigureOut">
               <a:rPr lang="en-US" smtClean="0"/>
-              <a:t>4/24/26</a:t>
+              <a:t>4/26/26</a:t>
             </a:fld>
             <a:endParaRPr lang="en-US"/>
           </a:p>
@@ -1133,7 +1146,7 @@
           <a:p>
             <a:fld id="{F4235B46-9602-B846-94AE-748D490F72A7}" type="datetimeFigureOut">
               <a:rPr lang="en-US" smtClean="0"/>
-              <a:t>4/24/26</a:t>
+              <a:t>4/26/26</a:t>
             </a:fld>
             <a:endParaRPr lang="en-US"/>
           </a:p>
@@ -1398,7 +1411,7 @@
           <a:p>
             <a:fld id="{F4235B46-9602-B846-94AE-748D490F72A7}" type="datetimeFigureOut">
               <a:rPr lang="en-US" smtClean="0"/>
-              <a:t>4/24/26</a:t>
+              <a:t>4/26/26</a:t>
             </a:fld>
             <a:endParaRPr lang="en-US"/>
           </a:p>
@@ -1810,7 +1823,7 @@
           <a:p>
             <a:fld id="{F4235B46-9602-B846-94AE-748D490F72A7}" type="datetimeFigureOut">
               <a:rPr lang="en-US" smtClean="0"/>
-              <a:t>4/24/26</a:t>
+              <a:t>4/26/26</a:t>
             </a:fld>
             <a:endParaRPr lang="en-US"/>
           </a:p>
@@ -1951,7 +1964,7 @@
           <a:p>
             <a:fld id="{F4235B46-9602-B846-94AE-748D490F72A7}" type="datetimeFigureOut">
               <a:rPr lang="en-US" smtClean="0"/>
-              <a:t>4/24/26</a:t>
+              <a:t>4/26/26</a:t>
             </a:fld>
             <a:endParaRPr lang="en-US"/>
           </a:p>
@@ -2064,7 +2077,7 @@
           <a:p>
             <a:fld id="{F4235B46-9602-B846-94AE-748D490F72A7}" type="datetimeFigureOut">
               <a:rPr lang="en-US" smtClean="0"/>
-              <a:t>4/24/26</a:t>
+              <a:t>4/26/26</a:t>
             </a:fld>
             <a:endParaRPr lang="en-US"/>
           </a:p>
@@ -2375,7 +2388,7 @@
           <a:p>
             <a:fld id="{F4235B46-9602-B846-94AE-748D490F72A7}" type="datetimeFigureOut">
               <a:rPr lang="en-US" smtClean="0"/>
-              <a:t>4/24/26</a:t>
+              <a:t>4/26/26</a:t>
             </a:fld>
             <a:endParaRPr lang="en-US"/>
           </a:p>
@@ -2663,7 +2676,7 @@
           <a:p>
             <a:fld id="{F4235B46-9602-B846-94AE-748D490F72A7}" type="datetimeFigureOut">
               <a:rPr lang="en-US" smtClean="0"/>
-              <a:t>4/24/26</a:t>
+              <a:t>4/26/26</a:t>
             </a:fld>
             <a:endParaRPr lang="en-US"/>
           </a:p>
@@ -2904,7 +2917,7 @@
           <a:p>
             <a:fld id="{F4235B46-9602-B846-94AE-748D490F72A7}" type="datetimeFigureOut">
               <a:rPr lang="en-US" smtClean="0"/>
-              <a:t>4/24/26</a:t>
+              <a:t>4/26/26</a:t>
             </a:fld>
             <a:endParaRPr lang="en-US"/>
           </a:p>
@@ -3339,38 +3352,54 @@
         </p:nvSpPr>
         <p:spPr/>
         <p:txBody>
+          <a:bodyPr>
+            <a:normAutofit/>
+          </a:bodyPr>
+          <a:lstStyle/>
+          <a:p>
+            <a:r>
+              <a:rPr lang="en-US" b="1" dirty="0" err="1"/>
+              <a:t>NetTower</a:t>
+            </a:r>
+            <a:r>
+              <a:rPr lang="en-US" b="1" dirty="0"/>
+              <a:t> – Network Situational Awareness Tool</a:t>
+            </a:r>
+            <a:endParaRPr lang="en-US" dirty="0"/>
+          </a:p>
+        </p:txBody>
+      </p:sp>
+      <p:sp>
+        <p:nvSpPr>
+          <p:cNvPr id="3" name="Subtitle 2">
+            <a:extLst>
+              <a:ext uri="{FF2B5EF4-FFF2-40B4-BE49-F238E27FC236}">
+                <a16:creationId xmlns:a16="http://schemas.microsoft.com/office/drawing/2014/main" id="{695206F4-7304-5FEE-D678-C65A8C929DFA}"/>
+              </a:ext>
+            </a:extLst>
+          </p:cNvPr>
+          <p:cNvSpPr>
+            <a:spLocks noGrp="1"/>
+          </p:cNvSpPr>
+          <p:nvPr>
+            <p:ph type="subTitle" idx="1"/>
+          </p:nvPr>
+        </p:nvSpPr>
+        <p:spPr/>
+        <p:txBody>
           <a:bodyPr/>
           <a:lstStyle/>
           <a:p>
             <a:r>
               <a:rPr lang="en-US" dirty="0"/>
-              <a:t>Final</a:t>
-            </a:r>
-          </a:p>
-        </p:txBody>
-      </p:sp>
-      <p:sp>
-        <p:nvSpPr>
-          <p:cNvPr id="3" name="Subtitle 2">
-            <a:extLst>
-              <a:ext uri="{FF2B5EF4-FFF2-40B4-BE49-F238E27FC236}">
-                <a16:creationId xmlns:a16="http://schemas.microsoft.com/office/drawing/2014/main" id="{695206F4-7304-5FEE-D678-C65A8C929DFA}"/>
-              </a:ext>
-            </a:extLst>
-          </p:cNvPr>
-          <p:cNvSpPr>
-            <a:spLocks noGrp="1"/>
-          </p:cNvSpPr>
-          <p:nvPr>
-            <p:ph type="subTitle" idx="1"/>
-          </p:nvPr>
-        </p:nvSpPr>
-        <p:spPr/>
-        <p:txBody>
-          <a:bodyPr/>
-          <a:lstStyle/>
-          <a:p>
-            <a:endParaRPr lang="en-US" dirty="0"/>
+              <a:t>Benjamin Molloy</a:t>
+            </a:r>
+          </a:p>
+          <a:p>
+            <a:r>
+              <a:rPr lang="en-US" dirty="0"/>
+              <a:t>ASE-485 Capstone FP</a:t>
+            </a:r>
           </a:p>
         </p:txBody>
       </p:sp>
@@ -3378,6 +3407,1409 @@
     <p:extLst>
       <p:ext uri="{BB962C8B-B14F-4D97-AF65-F5344CB8AC3E}">
         <p14:creationId xmlns:p14="http://schemas.microsoft.com/office/powerpoint/2010/main" val="2679514199"/>
+      </p:ext>
+    </p:extLst>
+  </p:cSld>
+  <p:clrMapOvr>
+    <a:masterClrMapping/>
+  </p:clrMapOvr>
+</p:sld>
+</file>
+
+<file path=ppt/slides/slide2.xml><?xml version="1.0" encoding="utf-8"?>
+<p:sld xmlns:a="http://schemas.openxmlformats.org/drawingml/2006/main" xmlns:r="http://schemas.openxmlformats.org/officeDocument/2006/relationships" xmlns:p="http://schemas.openxmlformats.org/presentationml/2006/main">
+  <p:cSld>
+    <p:spTree>
+      <p:nvGrpSpPr>
+        <p:cNvPr id="1" name=""/>
+        <p:cNvGrpSpPr/>
+        <p:nvPr/>
+      </p:nvGrpSpPr>
+      <p:grpSpPr>
+        <a:xfrm>
+          <a:off x="0" y="0"/>
+          <a:ext cx="0" cy="0"/>
+          <a:chOff x="0" y="0"/>
+          <a:chExt cx="0" cy="0"/>
+        </a:xfrm>
+      </p:grpSpPr>
+      <p:sp>
+        <p:nvSpPr>
+          <p:cNvPr id="2" name="Title 1">
+            <a:extLst>
+              <a:ext uri="{FF2B5EF4-FFF2-40B4-BE49-F238E27FC236}">
+                <a16:creationId xmlns:a16="http://schemas.microsoft.com/office/drawing/2014/main" id="{B65CD8C6-F01F-90ED-24E0-62345582446B}"/>
+              </a:ext>
+            </a:extLst>
+          </p:cNvPr>
+          <p:cNvSpPr>
+            <a:spLocks noGrp="1"/>
+          </p:cNvSpPr>
+          <p:nvPr>
+            <p:ph type="title"/>
+          </p:nvPr>
+        </p:nvSpPr>
+        <p:spPr/>
+        <p:txBody>
+          <a:bodyPr/>
+          <a:lstStyle/>
+          <a:p>
+            <a:r>
+              <a:rPr lang="en-US" dirty="0"/>
+              <a:t>Problem Domain</a:t>
+            </a:r>
+          </a:p>
+        </p:txBody>
+      </p:sp>
+      <p:sp>
+        <p:nvSpPr>
+          <p:cNvPr id="5" name="Rectangle 2">
+            <a:extLst>
+              <a:ext uri="{FF2B5EF4-FFF2-40B4-BE49-F238E27FC236}">
+                <a16:creationId xmlns:a16="http://schemas.microsoft.com/office/drawing/2014/main" id="{2ADBB1C4-C594-C5F2-6625-E3626CBBF790}"/>
+              </a:ext>
+            </a:extLst>
+          </p:cNvPr>
+          <p:cNvSpPr>
+            <a:spLocks noGrp="1" noChangeArrowheads="1"/>
+          </p:cNvSpPr>
+          <p:nvPr>
+            <p:ph idx="1"/>
+          </p:nvPr>
+        </p:nvSpPr>
+        <p:spPr bwMode="auto">
+          <a:xfrm>
+            <a:off x="838200" y="1690688"/>
+            <a:ext cx="6724136" cy="4401205"/>
+          </a:xfrm>
+          <a:prstGeom prst="rect">
+            <a:avLst/>
+          </a:prstGeom>
+          <a:noFill/>
+          <a:ln>
+            <a:noFill/>
+          </a:ln>
+          <a:effectLst/>
+          <a:extLst>
+            <a:ext uri="{909E8E84-426E-40DD-AFC4-6F175D3DCCD1}">
+              <a14:hiddenFill xmlns:a14="http://schemas.microsoft.com/office/drawing/2010/main">
+                <a:solidFill>
+                  <a:schemeClr val="accent1"/>
+                </a:solidFill>
+              </a14:hiddenFill>
+            </a:ext>
+            <a:ext uri="{91240B29-F687-4F45-9708-019B960494DF}">
+              <a14:hiddenLine xmlns:a14="http://schemas.microsoft.com/office/drawing/2010/main" w="9525">
+                <a:solidFill>
+                  <a:schemeClr val="tx1"/>
+                </a:solidFill>
+                <a:miter lim="800000"/>
+                <a:headEnd/>
+                <a:tailEnd/>
+              </a14:hiddenLine>
+            </a:ext>
+            <a:ext uri="{AF507438-7753-43E0-B8FC-AC1667EBCBE1}">
+              <a14:hiddenEffects xmlns:a14="http://schemas.microsoft.com/office/drawing/2010/main">
+                <a:effectLst>
+                  <a:outerShdw dist="35921" dir="2700000" algn="ctr" rotWithShape="0">
+                    <a:schemeClr val="bg2"/>
+                  </a:outerShdw>
+                </a:effectLst>
+              </a14:hiddenEffects>
+            </a:ext>
+          </a:extLst>
+        </p:spPr>
+        <p:txBody>
+          <a:bodyPr vert="horz" wrap="square" lIns="91440" tIns="45720" rIns="91440" bIns="45720" numCol="1" anchor="ctr" anchorCtr="0" compatLnSpc="1">
+            <a:prstTxWarp prst="textNoShape">
+              <a:avLst/>
+            </a:prstTxWarp>
+            <a:spAutoFit/>
+          </a:bodyPr>
+          <a:lstStyle/>
+          <a:p>
+            <a:pPr marL="0" lvl="0" indent="0" eaLnBrk="0" fontAlgn="base" hangingPunct="0">
+              <a:lnSpc>
+                <a:spcPct val="100000"/>
+              </a:lnSpc>
+              <a:spcBef>
+                <a:spcPct val="0"/>
+              </a:spcBef>
+              <a:spcAft>
+                <a:spcPct val="0"/>
+              </a:spcAft>
+              <a:buNone/>
+            </a:pPr>
+            <a:r>
+              <a:rPr kumimoji="0" lang="en-US" altLang="en-US" sz="2000" b="0" i="1" u="none" strike="noStrike" cap="none" normalizeH="0" baseline="0" dirty="0">
+                <a:ln>
+                  <a:noFill/>
+                </a:ln>
+                <a:solidFill>
+                  <a:schemeClr val="tx1"/>
+                </a:solidFill>
+                <a:effectLst/>
+                <a:latin typeface="Arial" panose="020B0604020202020204" pitchFamily="34" charset="0"/>
+              </a:rPr>
+              <a:t>“</a:t>
+            </a:r>
+            <a:r>
+              <a:rPr lang="en-US" sz="2000" i="1" dirty="0"/>
+              <a:t>Small or disrupted networks lack a simple way to quickly understand what devices are present and how they are generally connected.</a:t>
+            </a:r>
+            <a:r>
+              <a:rPr kumimoji="0" lang="en-US" altLang="en-US" sz="2000" b="0" i="1" u="none" strike="noStrike" cap="none" normalizeH="0" baseline="0" dirty="0">
+                <a:ln>
+                  <a:noFill/>
+                </a:ln>
+                <a:solidFill>
+                  <a:schemeClr val="tx1"/>
+                </a:solidFill>
+                <a:effectLst/>
+                <a:latin typeface="Arial" panose="020B0604020202020204" pitchFamily="34" charset="0"/>
+              </a:rPr>
+              <a:t>”</a:t>
+            </a:r>
+          </a:p>
+          <a:p>
+            <a:pPr marL="0" marR="0" lvl="0" indent="0" algn="l" defTabSz="914400" rtl="0" eaLnBrk="0" fontAlgn="base" latinLnBrk="0" hangingPunct="0">
+              <a:lnSpc>
+                <a:spcPct val="100000"/>
+              </a:lnSpc>
+              <a:spcBef>
+                <a:spcPct val="0"/>
+              </a:spcBef>
+              <a:spcAft>
+                <a:spcPct val="0"/>
+              </a:spcAft>
+              <a:buClrTx/>
+              <a:buSzTx/>
+              <a:buFontTx/>
+              <a:buNone/>
+              <a:tabLst/>
+            </a:pPr>
+            <a:endParaRPr lang="en-US" altLang="en-US" sz="2000" dirty="0">
+              <a:latin typeface="Arial" panose="020B0604020202020204" pitchFamily="34" charset="0"/>
+            </a:endParaRPr>
+          </a:p>
+          <a:p>
+            <a:pPr marL="0" marR="0" lvl="0" indent="0" algn="l" defTabSz="914400" rtl="0" eaLnBrk="0" fontAlgn="base" latinLnBrk="0" hangingPunct="0">
+              <a:lnSpc>
+                <a:spcPct val="100000"/>
+              </a:lnSpc>
+              <a:spcBef>
+                <a:spcPct val="0"/>
+              </a:spcBef>
+              <a:spcAft>
+                <a:spcPct val="0"/>
+              </a:spcAft>
+              <a:buClrTx/>
+              <a:buSzTx/>
+              <a:buFontTx/>
+              <a:buNone/>
+              <a:tabLst/>
+            </a:pPr>
+            <a:endParaRPr kumimoji="0" lang="en-US" altLang="en-US" sz="2000" b="0" i="0" u="none" strike="noStrike" cap="none" normalizeH="0" baseline="0" dirty="0">
+              <a:ln>
+                <a:noFill/>
+              </a:ln>
+              <a:solidFill>
+                <a:schemeClr val="tx1"/>
+              </a:solidFill>
+              <a:effectLst/>
+              <a:latin typeface="Arial" panose="020B0604020202020204" pitchFamily="34" charset="0"/>
+            </a:endParaRPr>
+          </a:p>
+          <a:p>
+            <a:pPr eaLnBrk="0" fontAlgn="base" hangingPunct="0">
+              <a:lnSpc>
+                <a:spcPct val="100000"/>
+              </a:lnSpc>
+              <a:spcBef>
+                <a:spcPct val="0"/>
+              </a:spcBef>
+              <a:spcAft>
+                <a:spcPct val="0"/>
+              </a:spcAft>
+            </a:pPr>
+            <a:r>
+              <a:rPr kumimoji="0" lang="en-US" altLang="en-US" sz="2000" b="0" i="0" u="none" strike="noStrike" cap="none" normalizeH="0" baseline="0" dirty="0">
+                <a:ln>
+                  <a:noFill/>
+                </a:ln>
+                <a:solidFill>
+                  <a:schemeClr val="tx1"/>
+                </a:solidFill>
+                <a:effectLst/>
+                <a:latin typeface="Arial" panose="020B0604020202020204" pitchFamily="34" charset="0"/>
+              </a:rPr>
+              <a:t>Limited visibility in small or disrupted networks </a:t>
+            </a:r>
+          </a:p>
+          <a:p>
+            <a:pPr eaLnBrk="0" fontAlgn="base" hangingPunct="0">
+              <a:lnSpc>
+                <a:spcPct val="100000"/>
+              </a:lnSpc>
+              <a:spcBef>
+                <a:spcPct val="0"/>
+              </a:spcBef>
+              <a:spcAft>
+                <a:spcPct val="0"/>
+              </a:spcAft>
+            </a:pPr>
+            <a:r>
+              <a:rPr kumimoji="0" lang="en-US" altLang="en-US" sz="2000" b="0" i="0" u="none" strike="noStrike" cap="none" normalizeH="0" baseline="0" dirty="0">
+                <a:ln>
+                  <a:noFill/>
+                </a:ln>
+                <a:solidFill>
+                  <a:schemeClr val="tx1"/>
+                </a:solidFill>
+                <a:effectLst/>
+                <a:latin typeface="Arial" panose="020B0604020202020204" pitchFamily="34" charset="0"/>
+              </a:rPr>
+              <a:t>No centralized monitoring in home labs / ad-hoc environments </a:t>
+            </a:r>
+          </a:p>
+          <a:p>
+            <a:pPr eaLnBrk="0" fontAlgn="base" hangingPunct="0">
+              <a:lnSpc>
+                <a:spcPct val="100000"/>
+              </a:lnSpc>
+              <a:spcBef>
+                <a:spcPct val="0"/>
+              </a:spcBef>
+              <a:spcAft>
+                <a:spcPct val="0"/>
+              </a:spcAft>
+            </a:pPr>
+            <a:r>
+              <a:rPr kumimoji="0" lang="en-US" altLang="en-US" sz="2000" b="0" i="0" u="none" strike="noStrike" cap="none" normalizeH="0" baseline="0" dirty="0">
+                <a:ln>
+                  <a:noFill/>
+                </a:ln>
+                <a:solidFill>
+                  <a:schemeClr val="tx1"/>
+                </a:solidFill>
+                <a:effectLst/>
+                <a:latin typeface="Arial" panose="020B0604020202020204" pitchFamily="34" charset="0"/>
+              </a:rPr>
+              <a:t>Enterprise tools are complex and resource-heavy </a:t>
+            </a:r>
+          </a:p>
+          <a:p>
+            <a:pPr eaLnBrk="0" fontAlgn="base" hangingPunct="0">
+              <a:lnSpc>
+                <a:spcPct val="100000"/>
+              </a:lnSpc>
+              <a:spcBef>
+                <a:spcPct val="0"/>
+              </a:spcBef>
+              <a:spcAft>
+                <a:spcPct val="0"/>
+              </a:spcAft>
+            </a:pPr>
+            <a:r>
+              <a:rPr kumimoji="0" lang="en-US" altLang="en-US" sz="2000" b="0" i="0" u="none" strike="noStrike" cap="none" normalizeH="0" baseline="0" dirty="0">
+                <a:ln>
+                  <a:noFill/>
+                </a:ln>
+                <a:solidFill>
+                  <a:schemeClr val="tx1"/>
+                </a:solidFill>
+                <a:effectLst/>
+                <a:latin typeface="Arial" panose="020B0604020202020204" pitchFamily="34" charset="0"/>
+              </a:rPr>
+              <a:t>Difficult to quickly identify: </a:t>
+            </a:r>
+          </a:p>
+          <a:p>
+            <a:pPr lvl="1" eaLnBrk="0" fontAlgn="base" hangingPunct="0">
+              <a:lnSpc>
+                <a:spcPct val="100000"/>
+              </a:lnSpc>
+              <a:spcBef>
+                <a:spcPct val="0"/>
+              </a:spcBef>
+              <a:spcAft>
+                <a:spcPct val="0"/>
+              </a:spcAft>
+            </a:pPr>
+            <a:r>
+              <a:rPr kumimoji="0" lang="en-US" altLang="en-US" sz="2000" b="0" i="0" u="none" strike="noStrike" cap="none" normalizeH="0" baseline="0" dirty="0">
+                <a:ln>
+                  <a:noFill/>
+                </a:ln>
+                <a:solidFill>
+                  <a:schemeClr val="tx1"/>
+                </a:solidFill>
+                <a:effectLst/>
+                <a:latin typeface="Arial" panose="020B0604020202020204" pitchFamily="34" charset="0"/>
+              </a:rPr>
+              <a:t>Devices on the network </a:t>
+            </a:r>
+          </a:p>
+          <a:p>
+            <a:pPr lvl="1" eaLnBrk="0" fontAlgn="base" hangingPunct="0">
+              <a:lnSpc>
+                <a:spcPct val="100000"/>
+              </a:lnSpc>
+              <a:spcBef>
+                <a:spcPct val="0"/>
+              </a:spcBef>
+              <a:spcAft>
+                <a:spcPct val="0"/>
+              </a:spcAft>
+            </a:pPr>
+            <a:r>
+              <a:rPr kumimoji="0" lang="en-US" altLang="en-US" sz="2000" b="0" i="0" u="none" strike="noStrike" cap="none" normalizeH="0" baseline="0" dirty="0">
+                <a:ln>
+                  <a:noFill/>
+                </a:ln>
+                <a:solidFill>
+                  <a:schemeClr val="tx1"/>
+                </a:solidFill>
+                <a:effectLst/>
+                <a:latin typeface="Arial" panose="020B0604020202020204" pitchFamily="34" charset="0"/>
+              </a:rPr>
+              <a:t>Reachability </a:t>
+            </a:r>
+          </a:p>
+          <a:p>
+            <a:pPr lvl="1" eaLnBrk="0" fontAlgn="base" hangingPunct="0">
+              <a:lnSpc>
+                <a:spcPct val="100000"/>
+              </a:lnSpc>
+              <a:spcBef>
+                <a:spcPct val="0"/>
+              </a:spcBef>
+              <a:spcAft>
+                <a:spcPct val="0"/>
+              </a:spcAft>
+            </a:pPr>
+            <a:r>
+              <a:rPr kumimoji="0" lang="en-US" altLang="en-US" sz="2000" b="0" i="0" u="none" strike="noStrike" cap="none" normalizeH="0" baseline="0" dirty="0">
+                <a:ln>
+                  <a:noFill/>
+                </a:ln>
+                <a:solidFill>
+                  <a:schemeClr val="tx1"/>
+                </a:solidFill>
+                <a:effectLst/>
+                <a:latin typeface="Arial" panose="020B0604020202020204" pitchFamily="34" charset="0"/>
+              </a:rPr>
+              <a:t>High-level connectivity</a:t>
+            </a:r>
+          </a:p>
+          <a:p>
+            <a:pPr marL="0" marR="0" lvl="0" indent="0" algn="l" defTabSz="914400" rtl="0" eaLnBrk="0" fontAlgn="base" latinLnBrk="0" hangingPunct="0">
+              <a:lnSpc>
+                <a:spcPct val="100000"/>
+              </a:lnSpc>
+              <a:spcBef>
+                <a:spcPct val="0"/>
+              </a:spcBef>
+              <a:spcAft>
+                <a:spcPct val="0"/>
+              </a:spcAft>
+              <a:buClrTx/>
+              <a:buSzTx/>
+              <a:buFontTx/>
+              <a:buNone/>
+              <a:tabLst/>
+            </a:pPr>
+            <a:endParaRPr kumimoji="0" lang="en-US" altLang="en-US" sz="2000" b="0" i="0" u="none" strike="noStrike" cap="none" normalizeH="0" baseline="0" dirty="0">
+              <a:ln>
+                <a:noFill/>
+              </a:ln>
+              <a:solidFill>
+                <a:schemeClr val="tx1"/>
+              </a:solidFill>
+              <a:effectLst/>
+              <a:latin typeface="Arial" panose="020B0604020202020204" pitchFamily="34" charset="0"/>
+            </a:endParaRPr>
+          </a:p>
+        </p:txBody>
+      </p:sp>
+    </p:spTree>
+    <p:extLst>
+      <p:ext uri="{BB962C8B-B14F-4D97-AF65-F5344CB8AC3E}">
+        <p14:creationId xmlns:p14="http://schemas.microsoft.com/office/powerpoint/2010/main" val="4272850892"/>
+      </p:ext>
+    </p:extLst>
+  </p:cSld>
+  <p:clrMapOvr>
+    <a:masterClrMapping/>
+  </p:clrMapOvr>
+</p:sld>
+</file>
+
+<file path=ppt/slides/slide3.xml><?xml version="1.0" encoding="utf-8"?>
+<p:sld xmlns:a="http://schemas.openxmlformats.org/drawingml/2006/main" xmlns:r="http://schemas.openxmlformats.org/officeDocument/2006/relationships" xmlns:p="http://schemas.openxmlformats.org/presentationml/2006/main">
+  <p:cSld>
+    <p:spTree>
+      <p:nvGrpSpPr>
+        <p:cNvPr id="1" name="">
+          <a:extLst>
+            <a:ext uri="{FF2B5EF4-FFF2-40B4-BE49-F238E27FC236}">
+              <a16:creationId xmlns:a16="http://schemas.microsoft.com/office/drawing/2014/main" id="{8059ECC1-D8FB-8A03-A009-54D1BCC87D47}"/>
+            </a:ext>
+          </a:extLst>
+        </p:cNvPr>
+        <p:cNvGrpSpPr/>
+        <p:nvPr/>
+      </p:nvGrpSpPr>
+      <p:grpSpPr>
+        <a:xfrm>
+          <a:off x="0" y="0"/>
+          <a:ext cx="0" cy="0"/>
+          <a:chOff x="0" y="0"/>
+          <a:chExt cx="0" cy="0"/>
+        </a:xfrm>
+      </p:grpSpPr>
+      <p:sp>
+        <p:nvSpPr>
+          <p:cNvPr id="2" name="Title 1">
+            <a:extLst>
+              <a:ext uri="{FF2B5EF4-FFF2-40B4-BE49-F238E27FC236}">
+                <a16:creationId xmlns:a16="http://schemas.microsoft.com/office/drawing/2014/main" id="{88E13803-ED97-2C88-34A0-168F78AAEE4C}"/>
+              </a:ext>
+            </a:extLst>
+          </p:cNvPr>
+          <p:cNvSpPr>
+            <a:spLocks noGrp="1"/>
+          </p:cNvSpPr>
+          <p:nvPr>
+            <p:ph type="title"/>
+          </p:nvPr>
+        </p:nvSpPr>
+        <p:spPr/>
+        <p:txBody>
+          <a:bodyPr/>
+          <a:lstStyle/>
+          <a:p>
+            <a:r>
+              <a:rPr lang="en-US" dirty="0"/>
+              <a:t>Solution</a:t>
+            </a:r>
+          </a:p>
+        </p:txBody>
+      </p:sp>
+      <p:sp>
+        <p:nvSpPr>
+          <p:cNvPr id="5" name="Rectangle 2">
+            <a:extLst>
+              <a:ext uri="{FF2B5EF4-FFF2-40B4-BE49-F238E27FC236}">
+                <a16:creationId xmlns:a16="http://schemas.microsoft.com/office/drawing/2014/main" id="{7779D086-CD4C-F1D8-8500-4FB9217537D1}"/>
+              </a:ext>
+            </a:extLst>
+          </p:cNvPr>
+          <p:cNvSpPr>
+            <a:spLocks noGrp="1" noChangeArrowheads="1"/>
+          </p:cNvSpPr>
+          <p:nvPr>
+            <p:ph idx="1"/>
+          </p:nvPr>
+        </p:nvSpPr>
+        <p:spPr bwMode="auto">
+          <a:xfrm>
+            <a:off x="838200" y="1843950"/>
+            <a:ext cx="7565570" cy="3170099"/>
+          </a:xfrm>
+          <a:prstGeom prst="rect">
+            <a:avLst/>
+          </a:prstGeom>
+          <a:noFill/>
+          <a:ln>
+            <a:noFill/>
+          </a:ln>
+          <a:effectLst/>
+          <a:extLst>
+            <a:ext uri="{909E8E84-426E-40DD-AFC4-6F175D3DCCD1}">
+              <a14:hiddenFill xmlns:a14="http://schemas.microsoft.com/office/drawing/2010/main">
+                <a:solidFill>
+                  <a:schemeClr val="accent1"/>
+                </a:solidFill>
+              </a14:hiddenFill>
+            </a:ext>
+            <a:ext uri="{91240B29-F687-4F45-9708-019B960494DF}">
+              <a14:hiddenLine xmlns:a14="http://schemas.microsoft.com/office/drawing/2010/main" w="9525">
+                <a:solidFill>
+                  <a:schemeClr val="tx1"/>
+                </a:solidFill>
+                <a:miter lim="800000"/>
+                <a:headEnd/>
+                <a:tailEnd/>
+              </a14:hiddenLine>
+            </a:ext>
+            <a:ext uri="{AF507438-7753-43E0-B8FC-AC1667EBCBE1}">
+              <a14:hiddenEffects xmlns:a14="http://schemas.microsoft.com/office/drawing/2010/main">
+                <a:effectLst>
+                  <a:outerShdw dist="35921" dir="2700000" algn="ctr" rotWithShape="0">
+                    <a:schemeClr val="bg2"/>
+                  </a:outerShdw>
+                </a:effectLst>
+              </a14:hiddenEffects>
+            </a:ext>
+          </a:extLst>
+        </p:spPr>
+        <p:txBody>
+          <a:bodyPr vert="horz" wrap="square" lIns="91440" tIns="45720" rIns="91440" bIns="45720" numCol="1" anchor="ctr" anchorCtr="0" compatLnSpc="1">
+            <a:prstTxWarp prst="textNoShape">
+              <a:avLst/>
+            </a:prstTxWarp>
+            <a:spAutoFit/>
+          </a:bodyPr>
+          <a:lstStyle/>
+          <a:p>
+            <a:pPr marL="0" indent="0" eaLnBrk="0" fontAlgn="base" hangingPunct="0">
+              <a:lnSpc>
+                <a:spcPct val="100000"/>
+              </a:lnSpc>
+              <a:spcBef>
+                <a:spcPct val="0"/>
+              </a:spcBef>
+              <a:spcAft>
+                <a:spcPct val="0"/>
+              </a:spcAft>
+              <a:buNone/>
+            </a:pPr>
+            <a:r>
+              <a:rPr lang="en-US" sz="2000" i="1" dirty="0"/>
+              <a:t>“</a:t>
+            </a:r>
+            <a:r>
+              <a:rPr lang="en-US" sz="2000" i="1" dirty="0" err="1"/>
+              <a:t>NetTower</a:t>
+            </a:r>
+            <a:r>
+              <a:rPr lang="en-US" sz="2000" i="1" dirty="0"/>
+              <a:t> provides a lightweight, quickly deployable system that discovers reachable devices, infers high-level connectivity relationships, and presents the results through an intuitive network visualization.”</a:t>
+            </a:r>
+            <a:endParaRPr kumimoji="0" lang="en-US" altLang="en-US" sz="2000" b="0" i="1" u="none" strike="noStrike" cap="none" normalizeH="0" baseline="0" dirty="0">
+              <a:ln>
+                <a:noFill/>
+              </a:ln>
+              <a:solidFill>
+                <a:schemeClr val="tx1"/>
+              </a:solidFill>
+              <a:effectLst/>
+              <a:latin typeface="Arial" panose="020B0604020202020204" pitchFamily="34" charset="0"/>
+            </a:endParaRPr>
+          </a:p>
+          <a:p>
+            <a:pPr eaLnBrk="0" fontAlgn="base" hangingPunct="0">
+              <a:lnSpc>
+                <a:spcPct val="100000"/>
+              </a:lnSpc>
+              <a:spcBef>
+                <a:spcPct val="0"/>
+              </a:spcBef>
+              <a:spcAft>
+                <a:spcPct val="0"/>
+              </a:spcAft>
+            </a:pPr>
+            <a:endParaRPr lang="en-US" altLang="en-US" sz="2000" dirty="0">
+              <a:latin typeface="Arial" panose="020B0604020202020204" pitchFamily="34" charset="0"/>
+            </a:endParaRPr>
+          </a:p>
+          <a:p>
+            <a:pPr eaLnBrk="0" fontAlgn="base" hangingPunct="0">
+              <a:lnSpc>
+                <a:spcPct val="100000"/>
+              </a:lnSpc>
+              <a:spcBef>
+                <a:spcPct val="0"/>
+              </a:spcBef>
+              <a:spcAft>
+                <a:spcPct val="0"/>
+              </a:spcAft>
+            </a:pPr>
+            <a:r>
+              <a:rPr kumimoji="0" lang="en-US" altLang="en-US" sz="2000" b="0" i="0" u="none" strike="noStrike" cap="none" normalizeH="0" baseline="0" dirty="0">
+                <a:ln>
+                  <a:noFill/>
+                </a:ln>
+                <a:solidFill>
+                  <a:schemeClr val="tx1"/>
+                </a:solidFill>
+                <a:effectLst/>
+                <a:latin typeface="Arial" panose="020B0604020202020204" pitchFamily="34" charset="0"/>
+              </a:rPr>
+              <a:t>Lightweight, agentless network discovery system </a:t>
+            </a:r>
+          </a:p>
+          <a:p>
+            <a:pPr eaLnBrk="0" fontAlgn="base" hangingPunct="0">
+              <a:lnSpc>
+                <a:spcPct val="100000"/>
+              </a:lnSpc>
+              <a:spcBef>
+                <a:spcPct val="0"/>
+              </a:spcBef>
+              <a:spcAft>
+                <a:spcPct val="0"/>
+              </a:spcAft>
+            </a:pPr>
+            <a:r>
+              <a:rPr kumimoji="0" lang="en-US" altLang="en-US" sz="2000" b="0" i="0" u="none" strike="noStrike" cap="none" normalizeH="0" baseline="0" dirty="0">
+                <a:ln>
+                  <a:noFill/>
+                </a:ln>
+                <a:solidFill>
+                  <a:schemeClr val="tx1"/>
+                </a:solidFill>
+                <a:effectLst/>
+                <a:latin typeface="Arial" panose="020B0604020202020204" pitchFamily="34" charset="0"/>
+              </a:rPr>
+              <a:t>Identifies reachable devices on a network </a:t>
+            </a:r>
+          </a:p>
+          <a:p>
+            <a:pPr eaLnBrk="0" fontAlgn="base" hangingPunct="0">
+              <a:lnSpc>
+                <a:spcPct val="100000"/>
+              </a:lnSpc>
+              <a:spcBef>
+                <a:spcPct val="0"/>
+              </a:spcBef>
+              <a:spcAft>
+                <a:spcPct val="0"/>
+              </a:spcAft>
+            </a:pPr>
+            <a:r>
+              <a:rPr kumimoji="0" lang="en-US" altLang="en-US" sz="2000" b="0" i="0" u="none" strike="noStrike" cap="none" normalizeH="0" baseline="0" dirty="0">
+                <a:ln>
+                  <a:noFill/>
+                </a:ln>
+                <a:solidFill>
+                  <a:schemeClr val="tx1"/>
+                </a:solidFill>
+                <a:effectLst/>
+                <a:latin typeface="Arial" panose="020B0604020202020204" pitchFamily="34" charset="0"/>
+              </a:rPr>
+              <a:t>Infers high-level connectivity relationships </a:t>
+            </a:r>
+          </a:p>
+          <a:p>
+            <a:pPr eaLnBrk="0" fontAlgn="base" hangingPunct="0">
+              <a:lnSpc>
+                <a:spcPct val="100000"/>
+              </a:lnSpc>
+              <a:spcBef>
+                <a:spcPct val="0"/>
+              </a:spcBef>
+              <a:spcAft>
+                <a:spcPct val="0"/>
+              </a:spcAft>
+            </a:pPr>
+            <a:r>
+              <a:rPr kumimoji="0" lang="en-US" altLang="en-US" sz="2000" b="0" i="0" u="none" strike="noStrike" cap="none" normalizeH="0" baseline="0" dirty="0">
+                <a:ln>
+                  <a:noFill/>
+                </a:ln>
+                <a:solidFill>
+                  <a:schemeClr val="tx1"/>
+                </a:solidFill>
+                <a:effectLst/>
+                <a:latin typeface="Arial" panose="020B0604020202020204" pitchFamily="34" charset="0"/>
+              </a:rPr>
+              <a:t>Presents results through an intuitive topology view </a:t>
+            </a:r>
+          </a:p>
+          <a:p>
+            <a:pPr eaLnBrk="0" fontAlgn="base" hangingPunct="0">
+              <a:lnSpc>
+                <a:spcPct val="100000"/>
+              </a:lnSpc>
+              <a:spcBef>
+                <a:spcPct val="0"/>
+              </a:spcBef>
+              <a:spcAft>
+                <a:spcPct val="0"/>
+              </a:spcAft>
+            </a:pPr>
+            <a:r>
+              <a:rPr kumimoji="0" lang="en-US" altLang="en-US" sz="2000" b="0" i="0" u="none" strike="noStrike" cap="none" normalizeH="0" baseline="0" dirty="0">
+                <a:ln>
+                  <a:noFill/>
+                </a:ln>
+                <a:solidFill>
+                  <a:schemeClr val="tx1"/>
+                </a:solidFill>
+                <a:effectLst/>
+                <a:latin typeface="Arial" panose="020B0604020202020204" pitchFamily="34" charset="0"/>
+              </a:rPr>
+              <a:t>Designed for clarity and accessibility over deep analysis</a:t>
+            </a:r>
+          </a:p>
+        </p:txBody>
+      </p:sp>
+    </p:spTree>
+    <p:extLst>
+      <p:ext uri="{BB962C8B-B14F-4D97-AF65-F5344CB8AC3E}">
+        <p14:creationId xmlns:p14="http://schemas.microsoft.com/office/powerpoint/2010/main" val="353689827"/>
+      </p:ext>
+    </p:extLst>
+  </p:cSld>
+  <p:clrMapOvr>
+    <a:masterClrMapping/>
+  </p:clrMapOvr>
+</p:sld>
+</file>
+
+<file path=ppt/slides/slide4.xml><?xml version="1.0" encoding="utf-8"?>
+<p:sld xmlns:a="http://schemas.openxmlformats.org/drawingml/2006/main" xmlns:r="http://schemas.openxmlformats.org/officeDocument/2006/relationships" xmlns:p="http://schemas.openxmlformats.org/presentationml/2006/main">
+  <p:cSld>
+    <p:spTree>
+      <p:nvGrpSpPr>
+        <p:cNvPr id="1" name="">
+          <a:extLst>
+            <a:ext uri="{FF2B5EF4-FFF2-40B4-BE49-F238E27FC236}">
+              <a16:creationId xmlns:a16="http://schemas.microsoft.com/office/drawing/2014/main" id="{53356E16-C07A-482D-9773-A6FBA538A89E}"/>
+            </a:ext>
+          </a:extLst>
+        </p:cNvPr>
+        <p:cNvGrpSpPr/>
+        <p:nvPr/>
+      </p:nvGrpSpPr>
+      <p:grpSpPr>
+        <a:xfrm>
+          <a:off x="0" y="0"/>
+          <a:ext cx="0" cy="0"/>
+          <a:chOff x="0" y="0"/>
+          <a:chExt cx="0" cy="0"/>
+        </a:xfrm>
+      </p:grpSpPr>
+      <p:sp>
+        <p:nvSpPr>
+          <p:cNvPr id="2" name="Title 1">
+            <a:extLst>
+              <a:ext uri="{FF2B5EF4-FFF2-40B4-BE49-F238E27FC236}">
+                <a16:creationId xmlns:a16="http://schemas.microsoft.com/office/drawing/2014/main" id="{45DF766F-5190-7FC7-01B6-FABA4981A37D}"/>
+              </a:ext>
+            </a:extLst>
+          </p:cNvPr>
+          <p:cNvSpPr>
+            <a:spLocks noGrp="1"/>
+          </p:cNvSpPr>
+          <p:nvPr>
+            <p:ph type="title"/>
+          </p:nvPr>
+        </p:nvSpPr>
+        <p:spPr/>
+        <p:txBody>
+          <a:bodyPr/>
+          <a:lstStyle/>
+          <a:p>
+            <a:r>
+              <a:rPr lang="en-US" dirty="0"/>
+              <a:t>Solution Overview (Tech Stack)</a:t>
+            </a:r>
+          </a:p>
+        </p:txBody>
+      </p:sp>
+      <p:sp>
+        <p:nvSpPr>
+          <p:cNvPr id="3" name="Content Placeholder 2">
+            <a:extLst>
+              <a:ext uri="{FF2B5EF4-FFF2-40B4-BE49-F238E27FC236}">
+                <a16:creationId xmlns:a16="http://schemas.microsoft.com/office/drawing/2014/main" id="{7B6A09EB-A33F-C2B8-88C0-82779474EE51}"/>
+              </a:ext>
+            </a:extLst>
+          </p:cNvPr>
+          <p:cNvSpPr>
+            <a:spLocks noGrp="1"/>
+          </p:cNvSpPr>
+          <p:nvPr>
+            <p:ph idx="1"/>
+          </p:nvPr>
+        </p:nvSpPr>
+        <p:spPr>
+          <a:xfrm>
+            <a:off x="838200" y="1690688"/>
+            <a:ext cx="10515600" cy="3747862"/>
+          </a:xfrm>
+        </p:spPr>
+        <p:txBody>
+          <a:bodyPr numCol="2">
+            <a:noAutofit/>
+          </a:bodyPr>
+          <a:lstStyle/>
+          <a:p>
+            <a:pPr marL="0" indent="0">
+              <a:buNone/>
+            </a:pPr>
+            <a:r>
+              <a:rPr lang="en-US" sz="2000" b="1" dirty="0"/>
+              <a:t>Languages</a:t>
+            </a:r>
+            <a:endParaRPr lang="en-US" sz="2000" dirty="0"/>
+          </a:p>
+          <a:p>
+            <a:r>
+              <a:rPr lang="en-US" sz="2000" dirty="0"/>
+              <a:t>Python (Backend) </a:t>
+            </a:r>
+          </a:p>
+          <a:p>
+            <a:r>
+              <a:rPr lang="en-US" sz="2000" dirty="0"/>
+              <a:t>JavaScript, HTML, CSS (Frontend) </a:t>
+            </a:r>
+          </a:p>
+          <a:p>
+            <a:pPr marL="0" indent="0">
+              <a:buNone/>
+            </a:pPr>
+            <a:r>
+              <a:rPr lang="en-US" sz="2000" b="1" dirty="0"/>
+              <a:t>Core Components</a:t>
+            </a:r>
+            <a:endParaRPr lang="en-US" sz="2000" dirty="0"/>
+          </a:p>
+          <a:p>
+            <a:r>
+              <a:rPr lang="en-US" sz="2000" dirty="0"/>
+              <a:t>Discovery (Active + Passive Scanning) </a:t>
+            </a:r>
+          </a:p>
+          <a:p>
+            <a:r>
+              <a:rPr lang="en-US" sz="2000" dirty="0"/>
+              <a:t>Event-driven processing pipeline </a:t>
+            </a:r>
+          </a:p>
+          <a:p>
+            <a:r>
+              <a:rPr lang="en-US" sz="2000" dirty="0"/>
+              <a:t>Data modeling (Hosts &amp; Edges) </a:t>
+            </a:r>
+          </a:p>
+          <a:p>
+            <a:r>
+              <a:rPr lang="en-US" sz="2000" dirty="0"/>
+              <a:t>MongoDB (runtime storage) </a:t>
+            </a:r>
+          </a:p>
+          <a:p>
+            <a:r>
+              <a:rPr lang="en-US" sz="2000" dirty="0"/>
+              <a:t>Electron-based visualization interface </a:t>
+            </a:r>
+          </a:p>
+          <a:p>
+            <a:pPr marL="0" indent="0">
+              <a:buNone/>
+            </a:pPr>
+            <a:r>
+              <a:rPr lang="en-US" sz="2000" b="1" dirty="0"/>
+              <a:t>Networking Tools</a:t>
+            </a:r>
+            <a:endParaRPr lang="en-US" sz="2000" dirty="0"/>
+          </a:p>
+          <a:p>
+            <a:r>
+              <a:rPr lang="en-US" sz="2000" dirty="0" err="1"/>
+              <a:t>tcpdump</a:t>
+            </a:r>
+            <a:r>
+              <a:rPr lang="en-US" sz="2000" dirty="0"/>
+              <a:t> </a:t>
+            </a:r>
+          </a:p>
+          <a:p>
+            <a:r>
+              <a:rPr lang="en-US" sz="2000" dirty="0"/>
+              <a:t>ICMP / ARP utilities </a:t>
+            </a:r>
+          </a:p>
+          <a:p>
+            <a:r>
+              <a:rPr lang="en-US" sz="2000" dirty="0"/>
+              <a:t>traceroute </a:t>
+            </a:r>
+          </a:p>
+          <a:p>
+            <a:r>
+              <a:rPr lang="en-US" sz="2000" dirty="0" err="1"/>
+              <a:t>nmap</a:t>
+            </a:r>
+            <a:r>
+              <a:rPr lang="en-US" sz="2000" dirty="0"/>
+              <a:t> </a:t>
+            </a:r>
+          </a:p>
+          <a:p>
+            <a:pPr marL="0" indent="0">
+              <a:buNone/>
+            </a:pPr>
+            <a:endParaRPr lang="en-US" sz="2000" dirty="0"/>
+          </a:p>
+        </p:txBody>
+      </p:sp>
+    </p:spTree>
+    <p:extLst>
+      <p:ext uri="{BB962C8B-B14F-4D97-AF65-F5344CB8AC3E}">
+        <p14:creationId xmlns:p14="http://schemas.microsoft.com/office/powerpoint/2010/main" val="927681024"/>
+      </p:ext>
+    </p:extLst>
+  </p:cSld>
+  <p:clrMapOvr>
+    <a:masterClrMapping/>
+  </p:clrMapOvr>
+</p:sld>
+</file>
+
+<file path=ppt/slides/slide5.xml><?xml version="1.0" encoding="utf-8"?>
+<p:sld xmlns:a="http://schemas.openxmlformats.org/drawingml/2006/main" xmlns:r="http://schemas.openxmlformats.org/officeDocument/2006/relationships" xmlns:p="http://schemas.openxmlformats.org/presentationml/2006/main">
+  <p:cSld>
+    <p:spTree>
+      <p:nvGrpSpPr>
+        <p:cNvPr id="1" name="">
+          <a:extLst>
+            <a:ext uri="{FF2B5EF4-FFF2-40B4-BE49-F238E27FC236}">
+              <a16:creationId xmlns:a16="http://schemas.microsoft.com/office/drawing/2014/main" id="{E3ECCFAF-3EE4-3EDC-A791-AD2B945D3034}"/>
+            </a:ext>
+          </a:extLst>
+        </p:cNvPr>
+        <p:cNvGrpSpPr/>
+        <p:nvPr/>
+      </p:nvGrpSpPr>
+      <p:grpSpPr>
+        <a:xfrm>
+          <a:off x="0" y="0"/>
+          <a:ext cx="0" cy="0"/>
+          <a:chOff x="0" y="0"/>
+          <a:chExt cx="0" cy="0"/>
+        </a:xfrm>
+      </p:grpSpPr>
+      <p:sp>
+        <p:nvSpPr>
+          <p:cNvPr id="2" name="Title 1">
+            <a:extLst>
+              <a:ext uri="{FF2B5EF4-FFF2-40B4-BE49-F238E27FC236}">
+                <a16:creationId xmlns:a16="http://schemas.microsoft.com/office/drawing/2014/main" id="{674E4A3E-2CEF-ED17-4ACF-802DBD322642}"/>
+              </a:ext>
+            </a:extLst>
+          </p:cNvPr>
+          <p:cNvSpPr>
+            <a:spLocks noGrp="1"/>
+          </p:cNvSpPr>
+          <p:nvPr>
+            <p:ph type="title"/>
+          </p:nvPr>
+        </p:nvSpPr>
+        <p:spPr/>
+        <p:txBody>
+          <a:bodyPr/>
+          <a:lstStyle/>
+          <a:p>
+            <a:r>
+              <a:rPr lang="en-US" dirty="0"/>
+              <a:t>Demo (Video/Product Page)</a:t>
+            </a:r>
+          </a:p>
+        </p:txBody>
+      </p:sp>
+      <p:sp>
+        <p:nvSpPr>
+          <p:cNvPr id="3" name="Content Placeholder 2">
+            <a:extLst>
+              <a:ext uri="{FF2B5EF4-FFF2-40B4-BE49-F238E27FC236}">
+                <a16:creationId xmlns:a16="http://schemas.microsoft.com/office/drawing/2014/main" id="{5462F880-2BA3-01AC-B05A-A23113AAD52D}"/>
+              </a:ext>
+            </a:extLst>
+          </p:cNvPr>
+          <p:cNvSpPr>
+            <a:spLocks noGrp="1"/>
+          </p:cNvSpPr>
+          <p:nvPr>
+            <p:ph idx="1"/>
+          </p:nvPr>
+        </p:nvSpPr>
+        <p:spPr/>
+        <p:txBody>
+          <a:bodyPr/>
+          <a:lstStyle/>
+          <a:p>
+            <a:pPr marL="0" indent="0">
+              <a:buNone/>
+            </a:pPr>
+            <a:r>
+              <a:rPr lang="en-US" dirty="0">
+                <a:hlinkClick r:id="rId2"/>
+              </a:rPr>
+              <a:t>https://nettower.org</a:t>
+            </a:r>
+            <a:r>
+              <a:rPr lang="en-US" dirty="0"/>
+              <a:t> </a:t>
+            </a:r>
+          </a:p>
+          <a:p>
+            <a:pPr marL="0" indent="0">
+              <a:buNone/>
+            </a:pPr>
+            <a:endParaRPr lang="en-US" dirty="0"/>
+          </a:p>
+          <a:p>
+            <a:pPr marL="0" indent="0">
+              <a:buNone/>
+            </a:pPr>
+            <a:endParaRPr lang="en-US" dirty="0"/>
+          </a:p>
+        </p:txBody>
+      </p:sp>
+    </p:spTree>
+    <p:extLst>
+      <p:ext uri="{BB962C8B-B14F-4D97-AF65-F5344CB8AC3E}">
+        <p14:creationId xmlns:p14="http://schemas.microsoft.com/office/powerpoint/2010/main" val="1950028464"/>
+      </p:ext>
+    </p:extLst>
+  </p:cSld>
+  <p:clrMapOvr>
+    <a:masterClrMapping/>
+  </p:clrMapOvr>
+</p:sld>
+</file>
+
+<file path=ppt/slides/slide6.xml><?xml version="1.0" encoding="utf-8"?>
+<p:sld xmlns:a="http://schemas.openxmlformats.org/drawingml/2006/main" xmlns:r="http://schemas.openxmlformats.org/officeDocument/2006/relationships" xmlns:p="http://schemas.openxmlformats.org/presentationml/2006/main">
+  <p:cSld>
+    <p:spTree>
+      <p:nvGrpSpPr>
+        <p:cNvPr id="1" name="">
+          <a:extLst>
+            <a:ext uri="{FF2B5EF4-FFF2-40B4-BE49-F238E27FC236}">
+              <a16:creationId xmlns:a16="http://schemas.microsoft.com/office/drawing/2014/main" id="{F8D47C65-B6E5-8FAE-8577-962F43120EC6}"/>
+            </a:ext>
+          </a:extLst>
+        </p:cNvPr>
+        <p:cNvGrpSpPr/>
+        <p:nvPr/>
+      </p:nvGrpSpPr>
+      <p:grpSpPr>
+        <a:xfrm>
+          <a:off x="0" y="0"/>
+          <a:ext cx="0" cy="0"/>
+          <a:chOff x="0" y="0"/>
+          <a:chExt cx="0" cy="0"/>
+        </a:xfrm>
+      </p:grpSpPr>
+      <p:sp>
+        <p:nvSpPr>
+          <p:cNvPr id="2" name="Title 1">
+            <a:extLst>
+              <a:ext uri="{FF2B5EF4-FFF2-40B4-BE49-F238E27FC236}">
+                <a16:creationId xmlns:a16="http://schemas.microsoft.com/office/drawing/2014/main" id="{4DEAD082-7B5C-FC9C-7AB4-DBC4DA9E7C1A}"/>
+              </a:ext>
+            </a:extLst>
+          </p:cNvPr>
+          <p:cNvSpPr>
+            <a:spLocks noGrp="1"/>
+          </p:cNvSpPr>
+          <p:nvPr>
+            <p:ph type="title"/>
+          </p:nvPr>
+        </p:nvSpPr>
+        <p:spPr/>
+        <p:txBody>
+          <a:bodyPr/>
+          <a:lstStyle/>
+          <a:p>
+            <a:endParaRPr lang="en-US"/>
+          </a:p>
+        </p:txBody>
+      </p:sp>
+      <p:sp>
+        <p:nvSpPr>
+          <p:cNvPr id="3" name="Content Placeholder 2">
+            <a:extLst>
+              <a:ext uri="{FF2B5EF4-FFF2-40B4-BE49-F238E27FC236}">
+                <a16:creationId xmlns:a16="http://schemas.microsoft.com/office/drawing/2014/main" id="{E0BDFCE6-CE28-8353-8EEC-80B819147467}"/>
+              </a:ext>
+            </a:extLst>
+          </p:cNvPr>
+          <p:cNvSpPr>
+            <a:spLocks noGrp="1"/>
+          </p:cNvSpPr>
+          <p:nvPr>
+            <p:ph idx="1"/>
+          </p:nvPr>
+        </p:nvSpPr>
+        <p:spPr/>
+        <p:txBody>
+          <a:bodyPr/>
+          <a:lstStyle/>
+          <a:p>
+            <a:endParaRPr lang="en-US"/>
+          </a:p>
+        </p:txBody>
+      </p:sp>
+    </p:spTree>
+    <p:extLst>
+      <p:ext uri="{BB962C8B-B14F-4D97-AF65-F5344CB8AC3E}">
+        <p14:creationId xmlns:p14="http://schemas.microsoft.com/office/powerpoint/2010/main" val="2368065465"/>
+      </p:ext>
+    </p:extLst>
+  </p:cSld>
+  <p:clrMapOvr>
+    <a:masterClrMapping/>
+  </p:clrMapOvr>
+</p:sld>
+</file>
+
+<file path=ppt/slides/slide7.xml><?xml version="1.0" encoding="utf-8"?>
+<p:sld xmlns:a="http://schemas.openxmlformats.org/drawingml/2006/main" xmlns:r="http://schemas.openxmlformats.org/officeDocument/2006/relationships" xmlns:p="http://schemas.openxmlformats.org/presentationml/2006/main">
+  <p:cSld>
+    <p:spTree>
+      <p:nvGrpSpPr>
+        <p:cNvPr id="1" name="">
+          <a:extLst>
+            <a:ext uri="{FF2B5EF4-FFF2-40B4-BE49-F238E27FC236}">
+              <a16:creationId xmlns:a16="http://schemas.microsoft.com/office/drawing/2014/main" id="{835038EB-1BD9-B34D-7F27-529F4538215F}"/>
+            </a:ext>
+          </a:extLst>
+        </p:cNvPr>
+        <p:cNvGrpSpPr/>
+        <p:nvPr/>
+      </p:nvGrpSpPr>
+      <p:grpSpPr>
+        <a:xfrm>
+          <a:off x="0" y="0"/>
+          <a:ext cx="0" cy="0"/>
+          <a:chOff x="0" y="0"/>
+          <a:chExt cx="0" cy="0"/>
+        </a:xfrm>
+      </p:grpSpPr>
+      <p:sp>
+        <p:nvSpPr>
+          <p:cNvPr id="2" name="Title 1">
+            <a:extLst>
+              <a:ext uri="{FF2B5EF4-FFF2-40B4-BE49-F238E27FC236}">
+                <a16:creationId xmlns:a16="http://schemas.microsoft.com/office/drawing/2014/main" id="{CF85AEAE-73B1-DCDD-7E98-E1ED91929CFF}"/>
+              </a:ext>
+            </a:extLst>
+          </p:cNvPr>
+          <p:cNvSpPr>
+            <a:spLocks noGrp="1"/>
+          </p:cNvSpPr>
+          <p:nvPr>
+            <p:ph type="title"/>
+          </p:nvPr>
+        </p:nvSpPr>
+        <p:spPr/>
+        <p:txBody>
+          <a:bodyPr/>
+          <a:lstStyle/>
+          <a:p>
+            <a:endParaRPr lang="en-US"/>
+          </a:p>
+        </p:txBody>
+      </p:sp>
+      <p:sp>
+        <p:nvSpPr>
+          <p:cNvPr id="3" name="Content Placeholder 2">
+            <a:extLst>
+              <a:ext uri="{FF2B5EF4-FFF2-40B4-BE49-F238E27FC236}">
+                <a16:creationId xmlns:a16="http://schemas.microsoft.com/office/drawing/2014/main" id="{C2898E24-755D-BFEF-7B81-5262B5DA854B}"/>
+              </a:ext>
+            </a:extLst>
+          </p:cNvPr>
+          <p:cNvSpPr>
+            <a:spLocks noGrp="1"/>
+          </p:cNvSpPr>
+          <p:nvPr>
+            <p:ph idx="1"/>
+          </p:nvPr>
+        </p:nvSpPr>
+        <p:spPr/>
+        <p:txBody>
+          <a:bodyPr/>
+          <a:lstStyle/>
+          <a:p>
+            <a:endParaRPr lang="en-US"/>
+          </a:p>
+        </p:txBody>
+      </p:sp>
+    </p:spTree>
+    <p:extLst>
+      <p:ext uri="{BB962C8B-B14F-4D97-AF65-F5344CB8AC3E}">
+        <p14:creationId xmlns:p14="http://schemas.microsoft.com/office/powerpoint/2010/main" val="4161748987"/>
+      </p:ext>
+    </p:extLst>
+  </p:cSld>
+  <p:clrMapOvr>
+    <a:masterClrMapping/>
+  </p:clrMapOvr>
+</p:sld>
+</file>
+
+<file path=ppt/slides/slide8.xml><?xml version="1.0" encoding="utf-8"?>
+<p:sld xmlns:a="http://schemas.openxmlformats.org/drawingml/2006/main" xmlns:r="http://schemas.openxmlformats.org/officeDocument/2006/relationships" xmlns:p="http://schemas.openxmlformats.org/presentationml/2006/main">
+  <p:cSld>
+    <p:spTree>
+      <p:nvGrpSpPr>
+        <p:cNvPr id="1" name="">
+          <a:extLst>
+            <a:ext uri="{FF2B5EF4-FFF2-40B4-BE49-F238E27FC236}">
+              <a16:creationId xmlns:a16="http://schemas.microsoft.com/office/drawing/2014/main" id="{5F51BC78-00C6-E533-B7DC-0D7C6DDEBA18}"/>
+            </a:ext>
+          </a:extLst>
+        </p:cNvPr>
+        <p:cNvGrpSpPr/>
+        <p:nvPr/>
+      </p:nvGrpSpPr>
+      <p:grpSpPr>
+        <a:xfrm>
+          <a:off x="0" y="0"/>
+          <a:ext cx="0" cy="0"/>
+          <a:chOff x="0" y="0"/>
+          <a:chExt cx="0" cy="0"/>
+        </a:xfrm>
+      </p:grpSpPr>
+      <p:sp>
+        <p:nvSpPr>
+          <p:cNvPr id="2" name="Title 1">
+            <a:extLst>
+              <a:ext uri="{FF2B5EF4-FFF2-40B4-BE49-F238E27FC236}">
+                <a16:creationId xmlns:a16="http://schemas.microsoft.com/office/drawing/2014/main" id="{87B3AEBF-FD16-9E12-F181-B70DA91D1EEE}"/>
+              </a:ext>
+            </a:extLst>
+          </p:cNvPr>
+          <p:cNvSpPr>
+            <a:spLocks noGrp="1"/>
+          </p:cNvSpPr>
+          <p:nvPr>
+            <p:ph type="title"/>
+          </p:nvPr>
+        </p:nvSpPr>
+        <p:spPr/>
+        <p:txBody>
+          <a:bodyPr/>
+          <a:lstStyle/>
+          <a:p>
+            <a:endParaRPr lang="en-US"/>
+          </a:p>
+        </p:txBody>
+      </p:sp>
+      <p:sp>
+        <p:nvSpPr>
+          <p:cNvPr id="3" name="Content Placeholder 2">
+            <a:extLst>
+              <a:ext uri="{FF2B5EF4-FFF2-40B4-BE49-F238E27FC236}">
+                <a16:creationId xmlns:a16="http://schemas.microsoft.com/office/drawing/2014/main" id="{7392A98B-4324-58BC-2EA1-2C6EE98A1287}"/>
+              </a:ext>
+            </a:extLst>
+          </p:cNvPr>
+          <p:cNvSpPr>
+            <a:spLocks noGrp="1"/>
+          </p:cNvSpPr>
+          <p:nvPr>
+            <p:ph idx="1"/>
+          </p:nvPr>
+        </p:nvSpPr>
+        <p:spPr/>
+        <p:txBody>
+          <a:bodyPr/>
+          <a:lstStyle/>
+          <a:p>
+            <a:endParaRPr lang="en-US"/>
+          </a:p>
+        </p:txBody>
+      </p:sp>
+    </p:spTree>
+    <p:extLst>
+      <p:ext uri="{BB962C8B-B14F-4D97-AF65-F5344CB8AC3E}">
+        <p14:creationId xmlns:p14="http://schemas.microsoft.com/office/powerpoint/2010/main" val="2007525213"/>
+      </p:ext>
+    </p:extLst>
+  </p:cSld>
+  <p:clrMapOvr>
+    <a:masterClrMapping/>
+  </p:clrMapOvr>
+</p:sld>
+</file>
+
+<file path=ppt/slides/slide9.xml><?xml version="1.0" encoding="utf-8"?>
+<p:sld xmlns:a="http://schemas.openxmlformats.org/drawingml/2006/main" xmlns:r="http://schemas.openxmlformats.org/officeDocument/2006/relationships" xmlns:p="http://schemas.openxmlformats.org/presentationml/2006/main">
+  <p:cSld>
+    <p:spTree>
+      <p:nvGrpSpPr>
+        <p:cNvPr id="1" name="">
+          <a:extLst>
+            <a:ext uri="{FF2B5EF4-FFF2-40B4-BE49-F238E27FC236}">
+              <a16:creationId xmlns:a16="http://schemas.microsoft.com/office/drawing/2014/main" id="{1ECC4B24-16E4-9A4E-3224-ACE158469137}"/>
+            </a:ext>
+          </a:extLst>
+        </p:cNvPr>
+        <p:cNvGrpSpPr/>
+        <p:nvPr/>
+      </p:nvGrpSpPr>
+      <p:grpSpPr>
+        <a:xfrm>
+          <a:off x="0" y="0"/>
+          <a:ext cx="0" cy="0"/>
+          <a:chOff x="0" y="0"/>
+          <a:chExt cx="0" cy="0"/>
+        </a:xfrm>
+      </p:grpSpPr>
+      <p:sp>
+        <p:nvSpPr>
+          <p:cNvPr id="2" name="Title 1">
+            <a:extLst>
+              <a:ext uri="{FF2B5EF4-FFF2-40B4-BE49-F238E27FC236}">
+                <a16:creationId xmlns:a16="http://schemas.microsoft.com/office/drawing/2014/main" id="{7800CEFA-0DA8-7C91-0ADA-7E6224D829AD}"/>
+              </a:ext>
+            </a:extLst>
+          </p:cNvPr>
+          <p:cNvSpPr>
+            <a:spLocks noGrp="1"/>
+          </p:cNvSpPr>
+          <p:nvPr>
+            <p:ph type="title"/>
+          </p:nvPr>
+        </p:nvSpPr>
+        <p:spPr/>
+        <p:txBody>
+          <a:bodyPr/>
+          <a:lstStyle/>
+          <a:p>
+            <a:endParaRPr lang="en-US"/>
+          </a:p>
+        </p:txBody>
+      </p:sp>
+      <p:sp>
+        <p:nvSpPr>
+          <p:cNvPr id="3" name="Content Placeholder 2">
+            <a:extLst>
+              <a:ext uri="{FF2B5EF4-FFF2-40B4-BE49-F238E27FC236}">
+                <a16:creationId xmlns:a16="http://schemas.microsoft.com/office/drawing/2014/main" id="{30BC5A30-72DC-20A7-DEE1-63307B1339E2}"/>
+              </a:ext>
+            </a:extLst>
+          </p:cNvPr>
+          <p:cNvSpPr>
+            <a:spLocks noGrp="1"/>
+          </p:cNvSpPr>
+          <p:nvPr>
+            <p:ph idx="1"/>
+          </p:nvPr>
+        </p:nvSpPr>
+        <p:spPr/>
+        <p:txBody>
+          <a:bodyPr/>
+          <a:lstStyle/>
+          <a:p>
+            <a:endParaRPr lang="en-US"/>
+          </a:p>
+        </p:txBody>
+      </p:sp>
+    </p:spTree>
+    <p:extLst>
+      <p:ext uri="{BB962C8B-B14F-4D97-AF65-F5344CB8AC3E}">
+        <p14:creationId xmlns:p14="http://schemas.microsoft.com/office/powerpoint/2010/main" val="2265691673"/>
       </p:ext>
     </p:extLst>
   </p:cSld>

--- a/docs/presentations/Final Presentation/Final Capstone Presentation.pptx
+++ b/docs/presentations/Final Presentation/Final Capstone Presentation.pptx
@@ -4437,28 +4437,67 @@
             <a:pPr marL="0" indent="0">
               <a:buNone/>
             </a:pPr>
+            <a:endParaRPr lang="en-US" dirty="0"/>
+          </a:p>
+          <a:p>
+            <a:pPr marL="0" indent="0">
+              <a:buNone/>
+            </a:pPr>
+            <a:endParaRPr lang="en-US" dirty="0"/>
+          </a:p>
+          <a:p>
+            <a:pPr marL="0" indent="0">
+              <a:buNone/>
+            </a:pPr>
+            <a:endParaRPr lang="en-US" dirty="0"/>
+          </a:p>
+          <a:p>
+            <a:pPr marL="0" indent="0">
+              <a:buNone/>
+            </a:pPr>
             <a:r>
               <a:rPr lang="en-US" dirty="0">
                 <a:hlinkClick r:id="rId2"/>
               </a:rPr>
+              <a:t>Demo Vid</a:t>
+            </a:r>
+            <a:r>
+              <a:rPr lang="en-US" dirty="0"/>
+              <a:t> (OneDrive)</a:t>
+            </a:r>
+          </a:p>
+          <a:p>
+            <a:pPr marL="0" indent="0">
+              <a:buNone/>
+            </a:pPr>
+            <a:endParaRPr lang="en-US" dirty="0"/>
+          </a:p>
+          <a:p>
+            <a:pPr marL="0" indent="0">
+              <a:buNone/>
+            </a:pPr>
+            <a:endParaRPr lang="en-US" dirty="0"/>
+          </a:p>
+          <a:p>
+            <a:pPr marL="0" indent="0">
+              <a:buNone/>
+            </a:pPr>
+            <a:endParaRPr lang="en-US" dirty="0"/>
+          </a:p>
+          <a:p>
+            <a:pPr marL="0" indent="0">
+              <a:buNone/>
+            </a:pPr>
+            <a:r>
+              <a:rPr lang="en-US" dirty="0">
+                <a:hlinkClick r:id="rId3"/>
+              </a:rPr>
               <a:t>https://nettower.org</a:t>
             </a:r>
             <a:r>
               <a:rPr lang="en-US" dirty="0"/>
               <a:t> </a:t>
             </a:r>
-          </a:p>
-          <a:p>
-            <a:pPr marL="0" indent="0">
-              <a:buNone/>
-            </a:pPr>
-            <a:endParaRPr lang="en-US" dirty="0"/>
-          </a:p>
-          <a:p>
-            <a:pPr marL="0" indent="0">
-              <a:buNone/>
-            </a:pPr>
-            <a:endParaRPr lang="en-US" dirty="0"/>
           </a:p>
         </p:txBody>
       </p:sp>

--- a/docs/presentations/Final Presentation/Final Capstone Presentation.pptx
+++ b/docs/presentations/Final Presentation/Final Capstone Presentation.pptx
@@ -11,9 +11,10 @@
     <p:sldId id="259" r:id="rId5"/>
     <p:sldId id="260" r:id="rId6"/>
     <p:sldId id="261" r:id="rId7"/>
-    <p:sldId id="262" r:id="rId8"/>
-    <p:sldId id="263" r:id="rId9"/>
-    <p:sldId id="264" r:id="rId10"/>
+    <p:sldId id="265" r:id="rId8"/>
+    <p:sldId id="262" r:id="rId9"/>
+    <p:sldId id="263" r:id="rId10"/>
+    <p:sldId id="264" r:id="rId11"/>
   </p:sldIdLst>
   <p:sldSz cx="12192000" cy="6858000"/>
   <p:notesSz cx="6858000" cy="9144000"/>
@@ -3350,10 +3351,15 @@
             <p:ph type="ctrTitle"/>
           </p:nvPr>
         </p:nvSpPr>
-        <p:spPr/>
+        <p:spPr>
+          <a:xfrm>
+            <a:off x="468907" y="1619662"/>
+            <a:ext cx="7660257" cy="2387600"/>
+          </a:xfrm>
+        </p:spPr>
         <p:txBody>
           <a:bodyPr>
-            <a:normAutofit/>
+            <a:normAutofit fontScale="90000"/>
           </a:bodyPr>
           <a:lstStyle/>
           <a:p>
@@ -3385,7 +3391,12 @@
             <p:ph type="subTitle" idx="1"/>
           </p:nvPr>
         </p:nvSpPr>
-        <p:spPr/>
+        <p:spPr>
+          <a:xfrm>
+            <a:off x="1327235" y="4206855"/>
+            <a:ext cx="5943600" cy="1655762"/>
+          </a:xfrm>
+        </p:spPr>
         <p:txBody>
           <a:bodyPr/>
           <a:lstStyle/>
@@ -3403,10 +3414,148 @@
           </a:p>
         </p:txBody>
       </p:sp>
+      <p:pic>
+        <p:nvPicPr>
+          <p:cNvPr id="5" name="Picture 4">
+            <a:extLst>
+              <a:ext uri="{FF2B5EF4-FFF2-40B4-BE49-F238E27FC236}">
+                <a16:creationId xmlns:a16="http://schemas.microsoft.com/office/drawing/2014/main" id="{D8F1BF8A-9DC5-2F61-00FE-C62ABB042985}"/>
+              </a:ext>
+            </a:extLst>
+          </p:cNvPr>
+          <p:cNvPicPr>
+            <a:picLocks noChangeAspect="1"/>
+          </p:cNvPicPr>
+          <p:nvPr/>
+        </p:nvPicPr>
+        <p:blipFill>
+          <a:blip r:embed="rId2">
+            <a:alphaModFix/>
+          </a:blip>
+          <a:stretch>
+            <a:fillRect/>
+          </a:stretch>
+        </p:blipFill>
+        <p:spPr>
+          <a:xfrm>
+            <a:off x="7270835" y="1207726"/>
+            <a:ext cx="4962242" cy="4442548"/>
+          </a:xfrm>
+          <a:prstGeom prst="rect">
+            <a:avLst/>
+          </a:prstGeom>
+          <a:noFill/>
+        </p:spPr>
+      </p:pic>
     </p:spTree>
     <p:extLst>
       <p:ext uri="{BB962C8B-B14F-4D97-AF65-F5344CB8AC3E}">
         <p14:creationId xmlns:p14="http://schemas.microsoft.com/office/powerpoint/2010/main" val="2679514199"/>
+      </p:ext>
+    </p:extLst>
+  </p:cSld>
+  <p:clrMapOvr>
+    <a:masterClrMapping/>
+  </p:clrMapOvr>
+</p:sld>
+</file>
+
+<file path=ppt/slides/slide10.xml><?xml version="1.0" encoding="utf-8"?>
+<p:sld xmlns:a="http://schemas.openxmlformats.org/drawingml/2006/main" xmlns:r="http://schemas.openxmlformats.org/officeDocument/2006/relationships" xmlns:p="http://schemas.openxmlformats.org/presentationml/2006/main">
+  <p:cSld>
+    <p:spTree>
+      <p:nvGrpSpPr>
+        <p:cNvPr id="1" name="">
+          <a:extLst>
+            <a:ext uri="{FF2B5EF4-FFF2-40B4-BE49-F238E27FC236}">
+              <a16:creationId xmlns:a16="http://schemas.microsoft.com/office/drawing/2014/main" id="{1ECC4B24-16E4-9A4E-3224-ACE158469137}"/>
+            </a:ext>
+          </a:extLst>
+        </p:cNvPr>
+        <p:cNvGrpSpPr/>
+        <p:nvPr/>
+      </p:nvGrpSpPr>
+      <p:grpSpPr>
+        <a:xfrm>
+          <a:off x="0" y="0"/>
+          <a:ext cx="0" cy="0"/>
+          <a:chOff x="0" y="0"/>
+          <a:chExt cx="0" cy="0"/>
+        </a:xfrm>
+      </p:grpSpPr>
+      <p:pic>
+        <p:nvPicPr>
+          <p:cNvPr id="4" name="Picture 3">
+            <a:extLst>
+              <a:ext uri="{FF2B5EF4-FFF2-40B4-BE49-F238E27FC236}">
+                <a16:creationId xmlns:a16="http://schemas.microsoft.com/office/drawing/2014/main" id="{44D6F5B3-17C9-9C36-32E9-34164CD47DBB}"/>
+              </a:ext>
+            </a:extLst>
+          </p:cNvPr>
+          <p:cNvPicPr>
+            <a:picLocks noChangeAspect="1"/>
+          </p:cNvPicPr>
+          <p:nvPr/>
+        </p:nvPicPr>
+        <p:blipFill>
+          <a:blip r:embed="rId2">
+            <a:alphaModFix amt="15000"/>
+          </a:blip>
+          <a:stretch>
+            <a:fillRect/>
+          </a:stretch>
+        </p:blipFill>
+        <p:spPr>
+          <a:xfrm>
+            <a:off x="2265871" y="0"/>
+            <a:ext cx="7660257" cy="6858000"/>
+          </a:xfrm>
+          <a:prstGeom prst="rect">
+            <a:avLst/>
+          </a:prstGeom>
+          <a:noFill/>
+        </p:spPr>
+      </p:pic>
+      <p:sp>
+        <p:nvSpPr>
+          <p:cNvPr id="2" name="Title 1">
+            <a:extLst>
+              <a:ext uri="{FF2B5EF4-FFF2-40B4-BE49-F238E27FC236}">
+                <a16:creationId xmlns:a16="http://schemas.microsoft.com/office/drawing/2014/main" id="{7800CEFA-0DA8-7C91-0ADA-7E6224D829AD}"/>
+              </a:ext>
+            </a:extLst>
+          </p:cNvPr>
+          <p:cNvSpPr>
+            <a:spLocks noGrp="1"/>
+          </p:cNvSpPr>
+          <p:nvPr>
+            <p:ph type="title"/>
+          </p:nvPr>
+        </p:nvSpPr>
+        <p:spPr>
+          <a:xfrm>
+            <a:off x="838199" y="2766218"/>
+            <a:ext cx="10515600" cy="1325563"/>
+          </a:xfrm>
+        </p:spPr>
+        <p:txBody>
+          <a:bodyPr>
+            <a:normAutofit/>
+          </a:bodyPr>
+          <a:lstStyle/>
+          <a:p>
+            <a:pPr algn="ctr"/>
+            <a:r>
+              <a:rPr lang="en-US" sz="6000" dirty="0"/>
+              <a:t>Questions?</a:t>
+            </a:r>
+          </a:p>
+        </p:txBody>
+      </p:sp>
+    </p:spTree>
+    <p:extLst>
+      <p:ext uri="{BB962C8B-B14F-4D97-AF65-F5344CB8AC3E}">
+        <p14:creationId xmlns:p14="http://schemas.microsoft.com/office/powerpoint/2010/main" val="2265691673"/>
       </p:ext>
     </p:extLst>
   </p:cSld>
@@ -3433,6 +3582,39 @@
           <a:chExt cx="0" cy="0"/>
         </a:xfrm>
       </p:grpSpPr>
+      <p:pic>
+        <p:nvPicPr>
+          <p:cNvPr id="7" name="Picture 6">
+            <a:extLst>
+              <a:ext uri="{FF2B5EF4-FFF2-40B4-BE49-F238E27FC236}">
+                <a16:creationId xmlns:a16="http://schemas.microsoft.com/office/drawing/2014/main" id="{2DF117D6-77FD-A251-6D7F-969AC57BB73D}"/>
+              </a:ext>
+            </a:extLst>
+          </p:cNvPr>
+          <p:cNvPicPr>
+            <a:picLocks noGrp="1" noRot="1" noChangeAspect="1" noMove="1" noResize="1" noEditPoints="1" noAdjustHandles="1" noChangeArrowheads="1" noChangeShapeType="1" noCrop="1"/>
+          </p:cNvPicPr>
+          <p:nvPr/>
+        </p:nvPicPr>
+        <p:blipFill>
+          <a:blip r:embed="rId2">
+            <a:alphaModFix amt="15000"/>
+          </a:blip>
+          <a:stretch>
+            <a:fillRect/>
+          </a:stretch>
+        </p:blipFill>
+        <p:spPr>
+          <a:xfrm>
+            <a:off x="2265871" y="0"/>
+            <a:ext cx="7660257" cy="6858000"/>
+          </a:xfrm>
+          <a:prstGeom prst="rect">
+            <a:avLst/>
+          </a:prstGeom>
+          <a:noFill/>
+        </p:spPr>
+      </p:pic>
       <p:sp>
         <p:nvSpPr>
           <p:cNvPr id="2" name="Title 1">
@@ -3868,6 +4050,39 @@
           <a:chExt cx="0" cy="0"/>
         </a:xfrm>
       </p:grpSpPr>
+      <p:pic>
+        <p:nvPicPr>
+          <p:cNvPr id="6" name="Picture 5">
+            <a:extLst>
+              <a:ext uri="{FF2B5EF4-FFF2-40B4-BE49-F238E27FC236}">
+                <a16:creationId xmlns:a16="http://schemas.microsoft.com/office/drawing/2014/main" id="{C39DD5BB-8E6D-3588-F42C-A0CCF3D5C002}"/>
+              </a:ext>
+            </a:extLst>
+          </p:cNvPr>
+          <p:cNvPicPr>
+            <a:picLocks noChangeAspect="1"/>
+          </p:cNvPicPr>
+          <p:nvPr/>
+        </p:nvPicPr>
+        <p:blipFill>
+          <a:blip r:embed="rId2">
+            <a:alphaModFix amt="15000"/>
+          </a:blip>
+          <a:stretch>
+            <a:fillRect/>
+          </a:stretch>
+        </p:blipFill>
+        <p:spPr>
+          <a:xfrm>
+            <a:off x="2265871" y="0"/>
+            <a:ext cx="7660257" cy="6858000"/>
+          </a:xfrm>
+          <a:prstGeom prst="rect">
+            <a:avLst/>
+          </a:prstGeom>
+          <a:noFill/>
+        </p:spPr>
+      </p:pic>
       <p:sp>
         <p:nvSpPr>
           <p:cNvPr id="2" name="Title 1">
@@ -4162,6 +4377,14 @@
 <file path=ppt/slides/slide4.xml><?xml version="1.0" encoding="utf-8"?>
 <p:sld xmlns:a="http://schemas.openxmlformats.org/drawingml/2006/main" xmlns:r="http://schemas.openxmlformats.org/officeDocument/2006/relationships" xmlns:p="http://schemas.openxmlformats.org/presentationml/2006/main">
   <p:cSld>
+    <p:bg>
+      <p:bgPr>
+        <a:solidFill>
+          <a:schemeClr val="bg1"/>
+        </a:solidFill>
+        <a:effectLst/>
+      </p:bgPr>
+    </p:bg>
     <p:spTree>
       <p:nvGrpSpPr>
         <p:cNvPr id="1" name="">
@@ -4182,6 +4405,39 @@
           <a:chExt cx="0" cy="0"/>
         </a:xfrm>
       </p:grpSpPr>
+      <p:pic>
+        <p:nvPicPr>
+          <p:cNvPr id="4" name="Picture 3">
+            <a:extLst>
+              <a:ext uri="{FF2B5EF4-FFF2-40B4-BE49-F238E27FC236}">
+                <a16:creationId xmlns:a16="http://schemas.microsoft.com/office/drawing/2014/main" id="{1C47F9CC-9B1A-EF83-91E7-7ECA8CD7D082}"/>
+              </a:ext>
+            </a:extLst>
+          </p:cNvPr>
+          <p:cNvPicPr>
+            <a:picLocks noChangeAspect="1"/>
+          </p:cNvPicPr>
+          <p:nvPr/>
+        </p:nvPicPr>
+        <p:blipFill>
+          <a:blip r:embed="rId2">
+            <a:alphaModFix amt="15000"/>
+          </a:blip>
+          <a:stretch>
+            <a:fillRect/>
+          </a:stretch>
+        </p:blipFill>
+        <p:spPr>
+          <a:xfrm>
+            <a:off x="2265871" y="0"/>
+            <a:ext cx="7660257" cy="6858000"/>
+          </a:xfrm>
+          <a:prstGeom prst="rect">
+            <a:avLst/>
+          </a:prstGeom>
+          <a:noFill/>
+        </p:spPr>
+      </p:pic>
       <p:sp>
         <p:nvSpPr>
           <p:cNvPr id="2" name="Title 1">
@@ -4385,6 +4641,39 @@
           <a:chExt cx="0" cy="0"/>
         </a:xfrm>
       </p:grpSpPr>
+      <p:pic>
+        <p:nvPicPr>
+          <p:cNvPr id="4" name="Picture 3">
+            <a:extLst>
+              <a:ext uri="{FF2B5EF4-FFF2-40B4-BE49-F238E27FC236}">
+                <a16:creationId xmlns:a16="http://schemas.microsoft.com/office/drawing/2014/main" id="{79894836-D253-6C5F-5F5F-FB041202AA86}"/>
+              </a:ext>
+            </a:extLst>
+          </p:cNvPr>
+          <p:cNvPicPr>
+            <a:picLocks noChangeAspect="1"/>
+          </p:cNvPicPr>
+          <p:nvPr/>
+        </p:nvPicPr>
+        <p:blipFill>
+          <a:blip r:embed="rId2">
+            <a:alphaModFix amt="15000"/>
+          </a:blip>
+          <a:stretch>
+            <a:fillRect/>
+          </a:stretch>
+        </p:blipFill>
+        <p:spPr>
+          <a:xfrm>
+            <a:off x="2265871" y="0"/>
+            <a:ext cx="7660257" cy="6858000"/>
+          </a:xfrm>
+          <a:prstGeom prst="rect">
+            <a:avLst/>
+          </a:prstGeom>
+          <a:noFill/>
+        </p:spPr>
+      </p:pic>
       <p:sp>
         <p:nvSpPr>
           <p:cNvPr id="2" name="Title 1">
@@ -4434,73 +4723,94 @@
           <a:bodyPr/>
           <a:lstStyle/>
           <a:p>
-            <a:pPr marL="0" indent="0">
-              <a:buNone/>
-            </a:pPr>
-            <a:endParaRPr lang="en-US" dirty="0"/>
-          </a:p>
-          <a:p>
-            <a:pPr marL="0" indent="0">
-              <a:buNone/>
-            </a:pPr>
-            <a:endParaRPr lang="en-US" dirty="0"/>
-          </a:p>
-          <a:p>
-            <a:pPr marL="0" indent="0">
-              <a:buNone/>
-            </a:pPr>
-            <a:endParaRPr lang="en-US" dirty="0"/>
-          </a:p>
-          <a:p>
-            <a:pPr marL="0" indent="0">
-              <a:buNone/>
-            </a:pPr>
-            <a:r>
-              <a:rPr lang="en-US" dirty="0">
-                <a:hlinkClick r:id="rId2"/>
-              </a:rPr>
-              <a:t>Demo Vid</a:t>
-            </a:r>
-            <a:r>
-              <a:rPr lang="en-US" dirty="0"/>
-              <a:t> (OneDrive)</a:t>
-            </a:r>
-          </a:p>
-          <a:p>
-            <a:pPr marL="0" indent="0">
-              <a:buNone/>
-            </a:pPr>
-            <a:endParaRPr lang="en-US" dirty="0"/>
-          </a:p>
-          <a:p>
-            <a:pPr marL="0" indent="0">
-              <a:buNone/>
-            </a:pPr>
-            <a:endParaRPr lang="en-US" dirty="0"/>
-          </a:p>
-          <a:p>
-            <a:pPr marL="0" indent="0">
-              <a:buNone/>
-            </a:pPr>
-            <a:endParaRPr lang="en-US" dirty="0"/>
-          </a:p>
-          <a:p>
-            <a:pPr marL="0" indent="0">
-              <a:buNone/>
-            </a:pPr>
             <a:r>
               <a:rPr lang="en-US" dirty="0">
                 <a:hlinkClick r:id="rId3"/>
               </a:rPr>
+              <a:t>Demo Vid</a:t>
+            </a:r>
+            <a:r>
+              <a:rPr lang="en-US" dirty="0"/>
+              <a:t> (OneDrive)</a:t>
+            </a:r>
+          </a:p>
+          <a:p>
+            <a:endParaRPr lang="en-US" dirty="0"/>
+          </a:p>
+          <a:p>
+            <a:r>
+              <a:rPr lang="en-US" dirty="0">
+                <a:hlinkClick r:id="rId4"/>
+              </a:rPr>
+              <a:t>Demo Vid</a:t>
+            </a:r>
+            <a:r>
+              <a:rPr lang="en-US" dirty="0"/>
+              <a:t> (GitHub)</a:t>
+            </a:r>
+          </a:p>
+          <a:p>
+            <a:endParaRPr lang="en-US" dirty="0"/>
+          </a:p>
+          <a:p>
+            <a:r>
+              <a:rPr lang="en-US" dirty="0">
+                <a:hlinkClick r:id="rId5"/>
+              </a:rPr>
               <a:t>https://nettower.org</a:t>
             </a:r>
-            <a:r>
-              <a:rPr lang="en-US" dirty="0"/>
-              <a:t> </a:t>
-            </a:r>
-          </a:p>
-        </p:txBody>
-      </p:sp>
+            <a:endParaRPr lang="en-US" dirty="0"/>
+          </a:p>
+          <a:p>
+            <a:endParaRPr lang="en-US" dirty="0"/>
+          </a:p>
+          <a:p>
+            <a:r>
+              <a:rPr lang="en-US" dirty="0">
+                <a:hlinkClick r:id="rId6"/>
+              </a:rPr>
+              <a:t>https://</a:t>
+            </a:r>
+            <a:r>
+              <a:rPr lang="en-US" dirty="0" err="1">
+                <a:hlinkClick r:id="rId6"/>
+              </a:rPr>
+              <a:t>molloy.info</a:t>
+            </a:r>
+            <a:endParaRPr lang="en-US" dirty="0"/>
+          </a:p>
+        </p:txBody>
+      </p:sp>
+      <p:pic>
+        <p:nvPicPr>
+          <p:cNvPr id="5" name="Picture 4">
+            <a:extLst>
+              <a:ext uri="{FF2B5EF4-FFF2-40B4-BE49-F238E27FC236}">
+                <a16:creationId xmlns:a16="http://schemas.microsoft.com/office/drawing/2014/main" id="{572E972F-D3F7-CFAC-7E75-347ABF2EC4A6}"/>
+              </a:ext>
+            </a:extLst>
+          </p:cNvPr>
+          <p:cNvPicPr>
+            <a:picLocks noChangeAspect="1"/>
+          </p:cNvPicPr>
+          <p:nvPr/>
+        </p:nvPicPr>
+        <p:blipFill>
+          <a:blip r:embed="rId7"/>
+          <a:stretch>
+            <a:fillRect/>
+          </a:stretch>
+        </p:blipFill>
+        <p:spPr>
+          <a:xfrm>
+            <a:off x="6178014" y="1825625"/>
+            <a:ext cx="5175785" cy="3801038"/>
+          </a:xfrm>
+          <a:prstGeom prst="rect">
+            <a:avLst/>
+          </a:prstGeom>
+        </p:spPr>
+      </p:pic>
     </p:spTree>
     <p:extLst>
       <p:ext uri="{BB962C8B-B14F-4D97-AF65-F5344CB8AC3E}">
@@ -4537,6 +4847,39 @@
           <a:chExt cx="0" cy="0"/>
         </a:xfrm>
       </p:grpSpPr>
+      <p:pic>
+        <p:nvPicPr>
+          <p:cNvPr id="5" name="Picture 4">
+            <a:extLst>
+              <a:ext uri="{FF2B5EF4-FFF2-40B4-BE49-F238E27FC236}">
+                <a16:creationId xmlns:a16="http://schemas.microsoft.com/office/drawing/2014/main" id="{A6A3AD61-1E5D-EBD7-A6A7-E3BD4FDE2485}"/>
+              </a:ext>
+            </a:extLst>
+          </p:cNvPr>
+          <p:cNvPicPr>
+            <a:picLocks noChangeAspect="1"/>
+          </p:cNvPicPr>
+          <p:nvPr/>
+        </p:nvPicPr>
+        <p:blipFill>
+          <a:blip r:embed="rId2">
+            <a:alphaModFix amt="15000"/>
+          </a:blip>
+          <a:stretch>
+            <a:fillRect/>
+          </a:stretch>
+        </p:blipFill>
+        <p:spPr>
+          <a:xfrm>
+            <a:off x="2265871" y="0"/>
+            <a:ext cx="7660257" cy="6858000"/>
+          </a:xfrm>
+          <a:prstGeom prst="rect">
+            <a:avLst/>
+          </a:prstGeom>
+          <a:noFill/>
+        </p:spPr>
+      </p:pic>
       <p:sp>
         <p:nvSpPr>
           <p:cNvPr id="2" name="Title 1">
@@ -4558,7 +4901,10 @@
           <a:bodyPr/>
           <a:lstStyle/>
           <a:p>
-            <a:endParaRPr lang="en-US"/>
+            <a:r>
+              <a:rPr lang="en-US" dirty="0"/>
+              <a:t>Sprint Progress</a:t>
+            </a:r>
           </a:p>
         </p:txBody>
       </p:sp>
@@ -4580,10 +4926,141 @@
         </p:nvSpPr>
         <p:spPr/>
         <p:txBody>
-          <a:bodyPr/>
-          <a:lstStyle/>
-          <a:p>
-            <a:endParaRPr lang="en-US"/>
+          <a:bodyPr>
+            <a:normAutofit fontScale="85000" lnSpcReduction="20000"/>
+          </a:bodyPr>
+          <a:lstStyle/>
+          <a:p>
+            <a:pPr marL="0" indent="0">
+              <a:buNone/>
+            </a:pPr>
+            <a:r>
+              <a:rPr lang="en-US" b="1" dirty="0"/>
+              <a:t>Sprint 1 (Backend Development)</a:t>
+            </a:r>
+            <a:endParaRPr lang="en-US" dirty="0"/>
+          </a:p>
+          <a:p>
+            <a:r>
+              <a:rPr lang="en-US" dirty="0"/>
+              <a:t>Project setup and baseline discovery </a:t>
+            </a:r>
+          </a:p>
+          <a:p>
+            <a:r>
+              <a:rPr lang="en-US" dirty="0"/>
+              <a:t>Host identification and scanning </a:t>
+            </a:r>
+          </a:p>
+          <a:p>
+            <a:r>
+              <a:rPr lang="en-US" dirty="0"/>
+              <a:t>Connectivity inference and relationship modeling </a:t>
+            </a:r>
+          </a:p>
+          <a:p>
+            <a:r>
+              <a:rPr lang="en-US" dirty="0"/>
+              <a:t>Backend pipeline completion and stabilization </a:t>
+            </a:r>
+          </a:p>
+          <a:p>
+            <a:pPr marL="0" indent="0">
+              <a:buNone/>
+            </a:pPr>
+            <a:r>
+              <a:rPr lang="en-US" b="1" dirty="0"/>
+              <a:t>Sprint 2 (Frontend + Integration)</a:t>
+            </a:r>
+            <a:endParaRPr lang="en-US" dirty="0"/>
+          </a:p>
+          <a:p>
+            <a:r>
+              <a:rPr lang="en-US" dirty="0"/>
+              <a:t>Frontend development and visualization </a:t>
+            </a:r>
+          </a:p>
+          <a:p>
+            <a:r>
+              <a:rPr lang="en-US" dirty="0"/>
+              <a:t>UI refinement and enhancements </a:t>
+            </a:r>
+          </a:p>
+          <a:p>
+            <a:r>
+              <a:rPr lang="en-US" dirty="0"/>
+              <a:t>Backend–frontend integration </a:t>
+            </a:r>
+          </a:p>
+          <a:p>
+            <a:r>
+              <a:rPr lang="en-US" dirty="0"/>
+              <a:t>Performance optimization and testing </a:t>
+            </a:r>
+          </a:p>
+          <a:p>
+            <a:r>
+              <a:rPr lang="en-US" dirty="0"/>
+              <a:t>Documentation and final deployment</a:t>
+            </a:r>
+          </a:p>
+          <a:p>
+            <a:endParaRPr lang="en-US" dirty="0"/>
+          </a:p>
+        </p:txBody>
+      </p:sp>
+      <p:sp>
+        <p:nvSpPr>
+          <p:cNvPr id="4" name="TextBox 3">
+            <a:extLst>
+              <a:ext uri="{FF2B5EF4-FFF2-40B4-BE49-F238E27FC236}">
+                <a16:creationId xmlns:a16="http://schemas.microsoft.com/office/drawing/2014/main" id="{4800F7CD-07D8-ECFD-9F9D-9DD115912887}"/>
+              </a:ext>
+            </a:extLst>
+          </p:cNvPr>
+          <p:cNvSpPr txBox="1"/>
+          <p:nvPr/>
+        </p:nvSpPr>
+        <p:spPr>
+          <a:xfrm>
+            <a:off x="9296400" y="381575"/>
+            <a:ext cx="3526971" cy="646331"/>
+          </a:xfrm>
+          <a:prstGeom prst="rect">
+            <a:avLst/>
+          </a:prstGeom>
+          <a:noFill/>
+        </p:spPr>
+        <p:txBody>
+          <a:bodyPr wrap="square" rtlCol="0">
+            <a:spAutoFit/>
+          </a:bodyPr>
+          <a:lstStyle/>
+          <a:p>
+            <a:r>
+              <a:rPr lang="en-US" dirty="0"/>
+              <a:t>Canvas: </a:t>
+            </a:r>
+            <a:r>
+              <a:rPr lang="en-US" dirty="0">
+                <a:hlinkClick r:id="rId3"/>
+              </a:rPr>
+              <a:t>Progress Link</a:t>
+            </a:r>
+            <a:endParaRPr lang="en-US" dirty="0"/>
+          </a:p>
+          <a:p>
+            <a:r>
+              <a:rPr lang="en-US" dirty="0"/>
+              <a:t>GitHub: </a:t>
+            </a:r>
+            <a:r>
+              <a:rPr lang="en-US" dirty="0">
+                <a:hlinkClick r:id="rId4"/>
+              </a:rPr>
+              <a:t>Progress Link</a:t>
+            </a:r>
+            <a:endParaRPr lang="en-US" dirty="0"/>
           </a:p>
         </p:txBody>
       </p:sp>
@@ -4601,6 +5078,209 @@
 </file>
 
 <file path=ppt/slides/slide7.xml><?xml version="1.0" encoding="utf-8"?>
+<p:sld xmlns:a="http://schemas.openxmlformats.org/drawingml/2006/main" xmlns:r="http://schemas.openxmlformats.org/officeDocument/2006/relationships" xmlns:p="http://schemas.openxmlformats.org/presentationml/2006/main">
+  <p:cSld>
+    <p:spTree>
+      <p:nvGrpSpPr>
+        <p:cNvPr id="1" name=""/>
+        <p:cNvGrpSpPr/>
+        <p:nvPr/>
+      </p:nvGrpSpPr>
+      <p:grpSpPr>
+        <a:xfrm>
+          <a:off x="0" y="0"/>
+          <a:ext cx="0" cy="0"/>
+          <a:chOff x="0" y="0"/>
+          <a:chExt cx="0" cy="0"/>
+        </a:xfrm>
+      </p:grpSpPr>
+      <p:pic>
+        <p:nvPicPr>
+          <p:cNvPr id="4" name="Picture 3">
+            <a:extLst>
+              <a:ext uri="{FF2B5EF4-FFF2-40B4-BE49-F238E27FC236}">
+                <a16:creationId xmlns:a16="http://schemas.microsoft.com/office/drawing/2014/main" id="{025922BF-8593-C189-4F08-88F32F949C98}"/>
+              </a:ext>
+            </a:extLst>
+          </p:cNvPr>
+          <p:cNvPicPr>
+            <a:picLocks noChangeAspect="1"/>
+          </p:cNvPicPr>
+          <p:nvPr/>
+        </p:nvPicPr>
+        <p:blipFill>
+          <a:blip r:embed="rId2">
+            <a:alphaModFix amt="15000"/>
+          </a:blip>
+          <a:stretch>
+            <a:fillRect/>
+          </a:stretch>
+        </p:blipFill>
+        <p:spPr>
+          <a:xfrm>
+            <a:off x="2265871" y="0"/>
+            <a:ext cx="7660257" cy="6858000"/>
+          </a:xfrm>
+          <a:prstGeom prst="rect">
+            <a:avLst/>
+          </a:prstGeom>
+          <a:noFill/>
+        </p:spPr>
+      </p:pic>
+      <p:sp>
+        <p:nvSpPr>
+          <p:cNvPr id="2" name="Title 1">
+            <a:extLst>
+              <a:ext uri="{FF2B5EF4-FFF2-40B4-BE49-F238E27FC236}">
+                <a16:creationId xmlns:a16="http://schemas.microsoft.com/office/drawing/2014/main" id="{6199EE96-02FC-53E5-D3B8-3EB8072BB05D}"/>
+              </a:ext>
+            </a:extLst>
+          </p:cNvPr>
+          <p:cNvSpPr>
+            <a:spLocks noGrp="1"/>
+          </p:cNvSpPr>
+          <p:nvPr>
+            <p:ph type="title"/>
+          </p:nvPr>
+        </p:nvSpPr>
+        <p:spPr/>
+        <p:txBody>
+          <a:bodyPr/>
+          <a:lstStyle/>
+          <a:p>
+            <a:r>
+              <a:rPr lang="en-US" dirty="0"/>
+              <a:t>AI Use (Coding + Learning)</a:t>
+            </a:r>
+          </a:p>
+        </p:txBody>
+      </p:sp>
+      <p:sp>
+        <p:nvSpPr>
+          <p:cNvPr id="3" name="Content Placeholder 2">
+            <a:extLst>
+              <a:ext uri="{FF2B5EF4-FFF2-40B4-BE49-F238E27FC236}">
+                <a16:creationId xmlns:a16="http://schemas.microsoft.com/office/drawing/2014/main" id="{CD1820D1-8BE6-95D6-2199-E694882896B1}"/>
+              </a:ext>
+            </a:extLst>
+          </p:cNvPr>
+          <p:cNvSpPr>
+            <a:spLocks noGrp="1"/>
+          </p:cNvSpPr>
+          <p:nvPr>
+            <p:ph idx="1"/>
+          </p:nvPr>
+        </p:nvSpPr>
+        <p:spPr>
+          <a:xfrm>
+            <a:off x="838200" y="1825625"/>
+            <a:ext cx="10515600" cy="4858204"/>
+          </a:xfrm>
+        </p:spPr>
+        <p:txBody>
+          <a:bodyPr numCol="2">
+            <a:normAutofit/>
+          </a:bodyPr>
+          <a:lstStyle/>
+          <a:p>
+            <a:pPr marL="0" indent="0">
+              <a:buNone/>
+            </a:pPr>
+            <a:r>
+              <a:rPr lang="en-US" b="1" dirty="0"/>
+              <a:t>AI for Development</a:t>
+            </a:r>
+            <a:endParaRPr lang="en-US" dirty="0"/>
+          </a:p>
+          <a:p>
+            <a:r>
+              <a:rPr lang="en-US" dirty="0"/>
+              <a:t>Assisted with architecture refinement </a:t>
+            </a:r>
+          </a:p>
+          <a:p>
+            <a:r>
+              <a:rPr lang="en-US" dirty="0"/>
+              <a:t>Helped debug and validate implementation decisions </a:t>
+            </a:r>
+          </a:p>
+          <a:p>
+            <a:r>
+              <a:rPr lang="en-US" dirty="0"/>
+              <a:t>Accelerated iteration and problem-solving </a:t>
+            </a:r>
+          </a:p>
+          <a:p>
+            <a:pPr marL="0" indent="0">
+              <a:buNone/>
+            </a:pPr>
+            <a:endParaRPr lang="en-US" b="1" dirty="0"/>
+          </a:p>
+          <a:p>
+            <a:pPr marL="0" indent="0">
+              <a:buNone/>
+            </a:pPr>
+            <a:endParaRPr lang="en-US" b="1" dirty="0"/>
+          </a:p>
+          <a:p>
+            <a:pPr marL="0" indent="0">
+              <a:buNone/>
+            </a:pPr>
+            <a:endParaRPr lang="en-US" b="1" dirty="0"/>
+          </a:p>
+          <a:p>
+            <a:pPr marL="0" indent="0">
+              <a:buNone/>
+            </a:pPr>
+            <a:r>
+              <a:rPr lang="en-US" b="1" dirty="0"/>
+              <a:t>Learning with AI</a:t>
+            </a:r>
+            <a:endParaRPr lang="en-US" dirty="0"/>
+          </a:p>
+          <a:p>
+            <a:r>
+              <a:rPr lang="en-US" dirty="0"/>
+              <a:t>Layer 2–4 protocol behavior and limitations </a:t>
+            </a:r>
+          </a:p>
+          <a:p>
+            <a:r>
+              <a:rPr lang="en-US" dirty="0"/>
+              <a:t>Packet structure (Ethernet, IP, TCP/UDP, ICMP) </a:t>
+            </a:r>
+          </a:p>
+          <a:p>
+            <a:r>
+              <a:rPr lang="en-US" dirty="0"/>
+              <a:t>Understanding what can vs cannot be inferred from network data </a:t>
+            </a:r>
+          </a:p>
+          <a:p>
+            <a:r>
+              <a:rPr lang="en-US" dirty="0"/>
+              <a:t>Validating reasoning in constrained environments</a:t>
+            </a:r>
+          </a:p>
+          <a:p>
+            <a:endParaRPr lang="en-US" dirty="0"/>
+          </a:p>
+        </p:txBody>
+      </p:sp>
+    </p:spTree>
+    <p:extLst>
+      <p:ext uri="{BB962C8B-B14F-4D97-AF65-F5344CB8AC3E}">
+        <p14:creationId xmlns:p14="http://schemas.microsoft.com/office/powerpoint/2010/main" val="4248356136"/>
+      </p:ext>
+    </p:extLst>
+  </p:cSld>
+  <p:clrMapOvr>
+    <a:masterClrMapping/>
+  </p:clrMapOvr>
+</p:sld>
+</file>
+
+<file path=ppt/slides/slide8.xml><?xml version="1.0" encoding="utf-8"?>
 <p:sld xmlns:a="http://schemas.openxmlformats.org/drawingml/2006/main" xmlns:r="http://schemas.openxmlformats.org/officeDocument/2006/relationships" xmlns:p="http://schemas.openxmlformats.org/presentationml/2006/main">
   <p:cSld>
     <p:spTree>
@@ -4623,6 +5303,39 @@
           <a:chExt cx="0" cy="0"/>
         </a:xfrm>
       </p:grpSpPr>
+      <p:pic>
+        <p:nvPicPr>
+          <p:cNvPr id="4" name="Picture 3">
+            <a:extLst>
+              <a:ext uri="{FF2B5EF4-FFF2-40B4-BE49-F238E27FC236}">
+                <a16:creationId xmlns:a16="http://schemas.microsoft.com/office/drawing/2014/main" id="{D7E74566-3221-0DD3-6382-BB8E8A7500F9}"/>
+              </a:ext>
+            </a:extLst>
+          </p:cNvPr>
+          <p:cNvPicPr>
+            <a:picLocks noChangeAspect="1"/>
+          </p:cNvPicPr>
+          <p:nvPr/>
+        </p:nvPicPr>
+        <p:blipFill>
+          <a:blip r:embed="rId2">
+            <a:alphaModFix amt="15000"/>
+          </a:blip>
+          <a:stretch>
+            <a:fillRect/>
+          </a:stretch>
+        </p:blipFill>
+        <p:spPr>
+          <a:xfrm>
+            <a:off x="2265871" y="0"/>
+            <a:ext cx="7660257" cy="6858000"/>
+          </a:xfrm>
+          <a:prstGeom prst="rect">
+            <a:avLst/>
+          </a:prstGeom>
+          <a:noFill/>
+        </p:spPr>
+      </p:pic>
       <p:sp>
         <p:nvSpPr>
           <p:cNvPr id="2" name="Title 1">
@@ -4644,7 +5357,10 @@
           <a:bodyPr/>
           <a:lstStyle/>
           <a:p>
-            <a:endParaRPr lang="en-US"/>
+            <a:r>
+              <a:rPr lang="en-US" dirty="0"/>
+              <a:t>Burn Down / Key Numbers</a:t>
+            </a:r>
           </a:p>
         </p:txBody>
       </p:sp>
@@ -4664,12 +5380,101 @@
             <p:ph idx="1"/>
           </p:nvPr>
         </p:nvSpPr>
-        <p:spPr/>
-        <p:txBody>
-          <a:bodyPr/>
-          <a:lstStyle/>
-          <a:p>
-            <a:endParaRPr lang="en-US"/>
+        <p:spPr>
+          <a:xfrm>
+            <a:off x="838200" y="2055813"/>
+            <a:ext cx="10515600" cy="4351338"/>
+          </a:xfrm>
+        </p:spPr>
+        <p:txBody>
+          <a:bodyPr numCol="2">
+            <a:normAutofit/>
+          </a:bodyPr>
+          <a:lstStyle/>
+          <a:p>
+            <a:pPr marL="0" indent="0">
+              <a:buNone/>
+            </a:pPr>
+            <a:r>
+              <a:rPr lang="en-US" b="1" dirty="0"/>
+              <a:t>Key Numbers</a:t>
+            </a:r>
+          </a:p>
+          <a:p>
+            <a:r>
+              <a:rPr lang="en-US" dirty="0"/>
+              <a:t>Total Lines of Code: 18,652</a:t>
+            </a:r>
+          </a:p>
+          <a:p>
+            <a:r>
+              <a:rPr lang="en-US" dirty="0"/>
+              <a:t>Core Features: 8/8</a:t>
+            </a:r>
+          </a:p>
+          <a:p>
+            <a:r>
+              <a:rPr lang="en-US" dirty="0"/>
+              <a:t>Requirements: 17/17</a:t>
+            </a:r>
+          </a:p>
+          <a:p>
+            <a:pPr marL="0" indent="0">
+              <a:buNone/>
+            </a:pPr>
+            <a:endParaRPr lang="en-US" b="1" dirty="0"/>
+          </a:p>
+          <a:p>
+            <a:pPr marL="0" indent="0">
+              <a:buNone/>
+            </a:pPr>
+            <a:endParaRPr lang="en-US" b="1" dirty="0"/>
+          </a:p>
+          <a:p>
+            <a:pPr marL="0" indent="0">
+              <a:buNone/>
+            </a:pPr>
+            <a:endParaRPr lang="en-US" b="1" dirty="0"/>
+          </a:p>
+          <a:p>
+            <a:pPr marL="0" indent="0">
+              <a:buNone/>
+            </a:pPr>
+            <a:r>
+              <a:rPr lang="en-US" dirty="0"/>
+              <a:t>100% Burn Down Rate</a:t>
+            </a:r>
+          </a:p>
+          <a:p>
+            <a:pPr marL="0" indent="0">
+              <a:buNone/>
+            </a:pPr>
+            <a:r>
+              <a:rPr lang="en-US" b="1" dirty="0"/>
+              <a:t>Code Tests</a:t>
+            </a:r>
+          </a:p>
+          <a:p>
+            <a:r>
+              <a:rPr lang="en-US" dirty="0"/>
+              <a:t>Automated Tests: 28/28 Passed</a:t>
+            </a:r>
+          </a:p>
+          <a:p>
+            <a:r>
+              <a:rPr lang="en-US" dirty="0"/>
+              <a:t>Manual Tests: 6/6 Passed</a:t>
+            </a:r>
+          </a:p>
+          <a:p>
+            <a:r>
+              <a:rPr lang="en-US" u="sng" dirty="0"/>
+              <a:t>Total Tests:</a:t>
+            </a:r>
+            <a:r>
+              <a:rPr lang="en-US" dirty="0"/>
+              <a:t> 34/34 Passed</a:t>
+            </a:r>
           </a:p>
         </p:txBody>
       </p:sp>
@@ -4686,7 +5491,7 @@
 </p:sld>
 </file>
 
-<file path=ppt/slides/slide8.xml><?xml version="1.0" encoding="utf-8"?>
+<file path=ppt/slides/slide9.xml><?xml version="1.0" encoding="utf-8"?>
 <p:sld xmlns:a="http://schemas.openxmlformats.org/drawingml/2006/main" xmlns:r="http://schemas.openxmlformats.org/officeDocument/2006/relationships" xmlns:p="http://schemas.openxmlformats.org/presentationml/2006/main">
   <p:cSld>
     <p:spTree>
@@ -4709,6 +5514,39 @@
           <a:chExt cx="0" cy="0"/>
         </a:xfrm>
       </p:grpSpPr>
+      <p:pic>
+        <p:nvPicPr>
+          <p:cNvPr id="4" name="Picture 3">
+            <a:extLst>
+              <a:ext uri="{FF2B5EF4-FFF2-40B4-BE49-F238E27FC236}">
+                <a16:creationId xmlns:a16="http://schemas.microsoft.com/office/drawing/2014/main" id="{D70D1CC4-949B-64D2-BCAB-A55C7EA6BA2D}"/>
+              </a:ext>
+            </a:extLst>
+          </p:cNvPr>
+          <p:cNvPicPr>
+            <a:picLocks noChangeAspect="1"/>
+          </p:cNvPicPr>
+          <p:nvPr/>
+        </p:nvPicPr>
+        <p:blipFill>
+          <a:blip r:embed="rId2">
+            <a:alphaModFix amt="15000"/>
+          </a:blip>
+          <a:stretch>
+            <a:fillRect/>
+          </a:stretch>
+        </p:blipFill>
+        <p:spPr>
+          <a:xfrm>
+            <a:off x="2265871" y="0"/>
+            <a:ext cx="7660257" cy="6858000"/>
+          </a:xfrm>
+          <a:prstGeom prst="rect">
+            <a:avLst/>
+          </a:prstGeom>
+          <a:noFill/>
+        </p:spPr>
+      </p:pic>
       <p:sp>
         <p:nvSpPr>
           <p:cNvPr id="2" name="Title 1">
@@ -4730,7 +5568,10 @@
           <a:bodyPr/>
           <a:lstStyle/>
           <a:p>
-            <a:endParaRPr lang="en-US"/>
+            <a:r>
+              <a:rPr lang="en-US" dirty="0"/>
+              <a:t>Future Plans</a:t>
+            </a:r>
           </a:p>
         </p:txBody>
       </p:sp>
@@ -4750,12 +5591,38 @@
             <p:ph idx="1"/>
           </p:nvPr>
         </p:nvSpPr>
-        <p:spPr/>
+        <p:spPr>
+          <a:xfrm>
+            <a:off x="838199" y="2055813"/>
+            <a:ext cx="10515600" cy="4351338"/>
+          </a:xfrm>
+        </p:spPr>
         <p:txBody>
           <a:bodyPr/>
           <a:lstStyle/>
           <a:p>
-            <a:endParaRPr lang="en-US"/>
+            <a:r>
+              <a:rPr lang="en-US" dirty="0"/>
+              <a:t>Rework Correlation and Interpretation Model</a:t>
+            </a:r>
+          </a:p>
+          <a:p>
+            <a:r>
+              <a:rPr lang="en-US" dirty="0"/>
+              <a:t>Modernize UI</a:t>
+            </a:r>
+          </a:p>
+          <a:p>
+            <a:r>
+              <a:rPr lang="en-US" dirty="0"/>
+              <a:t>Platform Implementation</a:t>
+            </a:r>
+          </a:p>
+          <a:p>
+            <a:r>
+              <a:rPr lang="en-US" dirty="0"/>
+              <a:t>Host Agent Integration Option</a:t>
+            </a:r>
           </a:p>
         </p:txBody>
       </p:sp>
@@ -4763,92 +5630,6 @@
     <p:extLst>
       <p:ext uri="{BB962C8B-B14F-4D97-AF65-F5344CB8AC3E}">
         <p14:creationId xmlns:p14="http://schemas.microsoft.com/office/powerpoint/2010/main" val="2007525213"/>
-      </p:ext>
-    </p:extLst>
-  </p:cSld>
-  <p:clrMapOvr>
-    <a:masterClrMapping/>
-  </p:clrMapOvr>
-</p:sld>
-</file>
-
-<file path=ppt/slides/slide9.xml><?xml version="1.0" encoding="utf-8"?>
-<p:sld xmlns:a="http://schemas.openxmlformats.org/drawingml/2006/main" xmlns:r="http://schemas.openxmlformats.org/officeDocument/2006/relationships" xmlns:p="http://schemas.openxmlformats.org/presentationml/2006/main">
-  <p:cSld>
-    <p:spTree>
-      <p:nvGrpSpPr>
-        <p:cNvPr id="1" name="">
-          <a:extLst>
-            <a:ext uri="{FF2B5EF4-FFF2-40B4-BE49-F238E27FC236}">
-              <a16:creationId xmlns:a16="http://schemas.microsoft.com/office/drawing/2014/main" id="{1ECC4B24-16E4-9A4E-3224-ACE158469137}"/>
-            </a:ext>
-          </a:extLst>
-        </p:cNvPr>
-        <p:cNvGrpSpPr/>
-        <p:nvPr/>
-      </p:nvGrpSpPr>
-      <p:grpSpPr>
-        <a:xfrm>
-          <a:off x="0" y="0"/>
-          <a:ext cx="0" cy="0"/>
-          <a:chOff x="0" y="0"/>
-          <a:chExt cx="0" cy="0"/>
-        </a:xfrm>
-      </p:grpSpPr>
-      <p:sp>
-        <p:nvSpPr>
-          <p:cNvPr id="2" name="Title 1">
-            <a:extLst>
-              <a:ext uri="{FF2B5EF4-FFF2-40B4-BE49-F238E27FC236}">
-                <a16:creationId xmlns:a16="http://schemas.microsoft.com/office/drawing/2014/main" id="{7800CEFA-0DA8-7C91-0ADA-7E6224D829AD}"/>
-              </a:ext>
-            </a:extLst>
-          </p:cNvPr>
-          <p:cNvSpPr>
-            <a:spLocks noGrp="1"/>
-          </p:cNvSpPr>
-          <p:nvPr>
-            <p:ph type="title"/>
-          </p:nvPr>
-        </p:nvSpPr>
-        <p:spPr/>
-        <p:txBody>
-          <a:bodyPr/>
-          <a:lstStyle/>
-          <a:p>
-            <a:endParaRPr lang="en-US"/>
-          </a:p>
-        </p:txBody>
-      </p:sp>
-      <p:sp>
-        <p:nvSpPr>
-          <p:cNvPr id="3" name="Content Placeholder 2">
-            <a:extLst>
-              <a:ext uri="{FF2B5EF4-FFF2-40B4-BE49-F238E27FC236}">
-                <a16:creationId xmlns:a16="http://schemas.microsoft.com/office/drawing/2014/main" id="{30BC5A30-72DC-20A7-DEE1-63307B1339E2}"/>
-              </a:ext>
-            </a:extLst>
-          </p:cNvPr>
-          <p:cNvSpPr>
-            <a:spLocks noGrp="1"/>
-          </p:cNvSpPr>
-          <p:nvPr>
-            <p:ph idx="1"/>
-          </p:nvPr>
-        </p:nvSpPr>
-        <p:spPr/>
-        <p:txBody>
-          <a:bodyPr/>
-          <a:lstStyle/>
-          <a:p>
-            <a:endParaRPr lang="en-US"/>
-          </a:p>
-        </p:txBody>
-      </p:sp>
-    </p:spTree>
-    <p:extLst>
-      <p:ext uri="{BB962C8B-B14F-4D97-AF65-F5344CB8AC3E}">
-        <p14:creationId xmlns:p14="http://schemas.microsoft.com/office/powerpoint/2010/main" val="2265691673"/>
       </p:ext>
     </p:extLst>
   </p:cSld>
